--- a/setup-de/Datenanalyse.pptx
+++ b/setup-de/Datenanalyse.pptx
@@ -4,10 +4,14 @@
   <p:sldMasterIdLst>
     <p:sldMasterId id="2147483648" r:id="rId1"/>
   </p:sldMasterIdLst>
+  <p:notesMasterIdLst>
+    <p:notesMasterId r:id="rId6"/>
+  </p:notesMasterIdLst>
   <p:sldIdLst>
     <p:sldId id="256" r:id="rId2"/>
-    <p:sldId id="257" r:id="rId3"/>
-    <p:sldId id="258" r:id="rId4"/>
+    <p:sldId id="259" r:id="rId3"/>
+    <p:sldId id="260" r:id="rId4"/>
+    <p:sldId id="258" r:id="rId5"/>
   </p:sldIdLst>
   <p:sldSz cx="12192000" cy="6858000"/>
   <p:notesSz cx="6858000" cy="9144000"/>
@@ -106,7 +110,944 @@
       </a:defRPr>
     </a:lvl9pPr>
   </p:defaultTextStyle>
+  <p:extLst>
+    <p:ext uri="{EFAFB233-063F-42B5-8137-9DF3F51BA10A}">
+      <p15:sldGuideLst xmlns:p15="http://schemas.microsoft.com/office/powerpoint/2012/main"/>
+    </p:ext>
+  </p:extLst>
 </p:presentation>
+</file>
+
+<file path=ppt/notesMasters/notesMaster1.xml><?xml version="1.0" encoding="utf-8"?>
+<p:notesMaster xmlns:a="http://schemas.openxmlformats.org/drawingml/2006/main" xmlns:r="http://schemas.openxmlformats.org/officeDocument/2006/relationships" xmlns:p="http://schemas.openxmlformats.org/presentationml/2006/main">
+  <p:cSld>
+    <p:bg>
+      <p:bgRef idx="1001">
+        <a:schemeClr val="bg1"/>
+      </p:bgRef>
+    </p:bg>
+    <p:spTree>
+      <p:nvGrpSpPr>
+        <p:cNvPr id="1" name=""/>
+        <p:cNvGrpSpPr/>
+        <p:nvPr/>
+      </p:nvGrpSpPr>
+      <p:grpSpPr>
+        <a:xfrm>
+          <a:off x="0" y="0"/>
+          <a:ext cx="0" cy="0"/>
+          <a:chOff x="0" y="0"/>
+          <a:chExt cx="0" cy="0"/>
+        </a:xfrm>
+      </p:grpSpPr>
+      <p:sp>
+        <p:nvSpPr>
+          <p:cNvPr id="2" name="Header Placeholder 1"/>
+          <p:cNvSpPr>
+            <a:spLocks noGrp="1"/>
+          </p:cNvSpPr>
+          <p:nvPr>
+            <p:ph type="hdr" sz="quarter"/>
+          </p:nvPr>
+        </p:nvSpPr>
+        <p:spPr>
+          <a:xfrm>
+            <a:off x="0" y="0"/>
+            <a:ext cx="2971800" cy="458788"/>
+          </a:xfrm>
+          <a:prstGeom prst="rect">
+            <a:avLst/>
+          </a:prstGeom>
+        </p:spPr>
+        <p:txBody>
+          <a:bodyPr vert="horz" lIns="91440" tIns="45720" rIns="91440" bIns="45720" rtlCol="0"/>
+          <a:lstStyle>
+            <a:lvl1pPr algn="l">
+              <a:defRPr sz="1200"/>
+            </a:lvl1pPr>
+          </a:lstStyle>
+          <a:p>
+            <a:endParaRPr lang="LID4096"/>
+          </a:p>
+        </p:txBody>
+      </p:sp>
+      <p:sp>
+        <p:nvSpPr>
+          <p:cNvPr id="3" name="Date Placeholder 2"/>
+          <p:cNvSpPr>
+            <a:spLocks noGrp="1"/>
+          </p:cNvSpPr>
+          <p:nvPr>
+            <p:ph type="dt" idx="1"/>
+          </p:nvPr>
+        </p:nvSpPr>
+        <p:spPr>
+          <a:xfrm>
+            <a:off x="3884613" y="0"/>
+            <a:ext cx="2971800" cy="458788"/>
+          </a:xfrm>
+          <a:prstGeom prst="rect">
+            <a:avLst/>
+          </a:prstGeom>
+        </p:spPr>
+        <p:txBody>
+          <a:bodyPr vert="horz" lIns="91440" tIns="45720" rIns="91440" bIns="45720" rtlCol="0"/>
+          <a:lstStyle>
+            <a:lvl1pPr algn="r">
+              <a:defRPr sz="1200"/>
+            </a:lvl1pPr>
+          </a:lstStyle>
+          <a:p>
+            <a:fld id="{629EF45C-B4A1-4048-BF7F-D1617E8131EB}" type="datetimeFigureOut">
+              <a:rPr lang="LID4096" smtClean="0"/>
+              <a:t>02/21/2026</a:t>
+            </a:fld>
+            <a:endParaRPr lang="LID4096"/>
+          </a:p>
+        </p:txBody>
+      </p:sp>
+      <p:sp>
+        <p:nvSpPr>
+          <p:cNvPr id="4" name="Slide Image Placeholder 3"/>
+          <p:cNvSpPr>
+            <a:spLocks noGrp="1" noRot="1" noChangeAspect="1"/>
+          </p:cNvSpPr>
+          <p:nvPr>
+            <p:ph type="sldImg" idx="2"/>
+          </p:nvPr>
+        </p:nvSpPr>
+        <p:spPr>
+          <a:xfrm>
+            <a:off x="685800" y="1143000"/>
+            <a:ext cx="5486400" cy="3086100"/>
+          </a:xfrm>
+          <a:prstGeom prst="rect">
+            <a:avLst/>
+          </a:prstGeom>
+          <a:noFill/>
+          <a:ln w="12700">
+            <a:solidFill>
+              <a:prstClr val="black"/>
+            </a:solidFill>
+          </a:ln>
+        </p:spPr>
+        <p:txBody>
+          <a:bodyPr vert="horz" lIns="91440" tIns="45720" rIns="91440" bIns="45720" rtlCol="0" anchor="ctr"/>
+          <a:lstStyle/>
+          <a:p>
+            <a:endParaRPr lang="LID4096"/>
+          </a:p>
+        </p:txBody>
+      </p:sp>
+      <p:sp>
+        <p:nvSpPr>
+          <p:cNvPr id="5" name="Notes Placeholder 4"/>
+          <p:cNvSpPr>
+            <a:spLocks noGrp="1"/>
+          </p:cNvSpPr>
+          <p:nvPr>
+            <p:ph type="body" sz="quarter" idx="3"/>
+          </p:nvPr>
+        </p:nvSpPr>
+        <p:spPr>
+          <a:xfrm>
+            <a:off x="685800" y="4400550"/>
+            <a:ext cx="5486400" cy="3600450"/>
+          </a:xfrm>
+          <a:prstGeom prst="rect">
+            <a:avLst/>
+          </a:prstGeom>
+        </p:spPr>
+        <p:txBody>
+          <a:bodyPr vert="horz" lIns="91440" tIns="45720" rIns="91440" bIns="45720" rtlCol="0"/>
+          <a:lstStyle/>
+          <a:p>
+            <a:pPr lvl="0"/>
+            <a:r>
+              <a:rPr lang="en-US"/>
+              <a:t>Click to edit Master text styles</a:t>
+            </a:r>
+          </a:p>
+          <a:p>
+            <a:pPr lvl="1"/>
+            <a:r>
+              <a:rPr lang="en-US"/>
+              <a:t>Second level</a:t>
+            </a:r>
+          </a:p>
+          <a:p>
+            <a:pPr lvl="2"/>
+            <a:r>
+              <a:rPr lang="en-US"/>
+              <a:t>Third level</a:t>
+            </a:r>
+          </a:p>
+          <a:p>
+            <a:pPr lvl="3"/>
+            <a:r>
+              <a:rPr lang="en-US"/>
+              <a:t>Fourth level</a:t>
+            </a:r>
+          </a:p>
+          <a:p>
+            <a:pPr lvl="4"/>
+            <a:r>
+              <a:rPr lang="en-US"/>
+              <a:t>Fifth level</a:t>
+            </a:r>
+            <a:endParaRPr lang="LID4096"/>
+          </a:p>
+        </p:txBody>
+      </p:sp>
+      <p:sp>
+        <p:nvSpPr>
+          <p:cNvPr id="6" name="Footer Placeholder 5"/>
+          <p:cNvSpPr>
+            <a:spLocks noGrp="1"/>
+          </p:cNvSpPr>
+          <p:nvPr>
+            <p:ph type="ftr" sz="quarter" idx="4"/>
+          </p:nvPr>
+        </p:nvSpPr>
+        <p:spPr>
+          <a:xfrm>
+            <a:off x="0" y="8685213"/>
+            <a:ext cx="2971800" cy="458787"/>
+          </a:xfrm>
+          <a:prstGeom prst="rect">
+            <a:avLst/>
+          </a:prstGeom>
+        </p:spPr>
+        <p:txBody>
+          <a:bodyPr vert="horz" lIns="91440" tIns="45720" rIns="91440" bIns="45720" rtlCol="0" anchor="b"/>
+          <a:lstStyle>
+            <a:lvl1pPr algn="l">
+              <a:defRPr sz="1200"/>
+            </a:lvl1pPr>
+          </a:lstStyle>
+          <a:p>
+            <a:endParaRPr lang="LID4096"/>
+          </a:p>
+        </p:txBody>
+      </p:sp>
+      <p:sp>
+        <p:nvSpPr>
+          <p:cNvPr id="7" name="Slide Number Placeholder 6"/>
+          <p:cNvSpPr>
+            <a:spLocks noGrp="1"/>
+          </p:cNvSpPr>
+          <p:nvPr>
+            <p:ph type="sldNum" sz="quarter" idx="5"/>
+          </p:nvPr>
+        </p:nvSpPr>
+        <p:spPr>
+          <a:xfrm>
+            <a:off x="3884613" y="8685213"/>
+            <a:ext cx="2971800" cy="458787"/>
+          </a:xfrm>
+          <a:prstGeom prst="rect">
+            <a:avLst/>
+          </a:prstGeom>
+        </p:spPr>
+        <p:txBody>
+          <a:bodyPr vert="horz" lIns="91440" tIns="45720" rIns="91440" bIns="45720" rtlCol="0" anchor="b"/>
+          <a:lstStyle>
+            <a:lvl1pPr algn="r">
+              <a:defRPr sz="1200"/>
+            </a:lvl1pPr>
+          </a:lstStyle>
+          <a:p>
+            <a:fld id="{60C2D7CD-EEF3-4145-A484-A9D67FF727B1}" type="slidenum">
+              <a:rPr lang="LID4096" smtClean="0"/>
+              <a:t>‹#›</a:t>
+            </a:fld>
+            <a:endParaRPr lang="LID4096"/>
+          </a:p>
+        </p:txBody>
+      </p:sp>
+    </p:spTree>
+    <p:extLst>
+      <p:ext uri="{BB962C8B-B14F-4D97-AF65-F5344CB8AC3E}">
+        <p14:creationId xmlns:p14="http://schemas.microsoft.com/office/powerpoint/2010/main" val="2339142301"/>
+      </p:ext>
+    </p:extLst>
+  </p:cSld>
+  <p:clrMap bg1="lt1" tx1="dk1" bg2="lt2" tx2="dk2" accent1="accent1" accent2="accent2" accent3="accent3" accent4="accent4" accent5="accent5" accent6="accent6" hlink="hlink" folHlink="folHlink"/>
+  <p:notesStyle>
+    <a:lvl1pPr marL="0" algn="l" defTabSz="914400" rtl="0" eaLnBrk="1" latinLnBrk="0" hangingPunct="1">
+      <a:defRPr sz="1200" kern="1200">
+        <a:solidFill>
+          <a:schemeClr val="tx1"/>
+        </a:solidFill>
+        <a:latin typeface="+mn-lt"/>
+        <a:ea typeface="+mn-ea"/>
+        <a:cs typeface="+mn-cs"/>
+      </a:defRPr>
+    </a:lvl1pPr>
+    <a:lvl2pPr marL="457200" algn="l" defTabSz="914400" rtl="0" eaLnBrk="1" latinLnBrk="0" hangingPunct="1">
+      <a:defRPr sz="1200" kern="1200">
+        <a:solidFill>
+          <a:schemeClr val="tx1"/>
+        </a:solidFill>
+        <a:latin typeface="+mn-lt"/>
+        <a:ea typeface="+mn-ea"/>
+        <a:cs typeface="+mn-cs"/>
+      </a:defRPr>
+    </a:lvl2pPr>
+    <a:lvl3pPr marL="914400" algn="l" defTabSz="914400" rtl="0" eaLnBrk="1" latinLnBrk="0" hangingPunct="1">
+      <a:defRPr sz="1200" kern="1200">
+        <a:solidFill>
+          <a:schemeClr val="tx1"/>
+        </a:solidFill>
+        <a:latin typeface="+mn-lt"/>
+        <a:ea typeface="+mn-ea"/>
+        <a:cs typeface="+mn-cs"/>
+      </a:defRPr>
+    </a:lvl3pPr>
+    <a:lvl4pPr marL="1371600" algn="l" defTabSz="914400" rtl="0" eaLnBrk="1" latinLnBrk="0" hangingPunct="1">
+      <a:defRPr sz="1200" kern="1200">
+        <a:solidFill>
+          <a:schemeClr val="tx1"/>
+        </a:solidFill>
+        <a:latin typeface="+mn-lt"/>
+        <a:ea typeface="+mn-ea"/>
+        <a:cs typeface="+mn-cs"/>
+      </a:defRPr>
+    </a:lvl4pPr>
+    <a:lvl5pPr marL="1828800" algn="l" defTabSz="914400" rtl="0" eaLnBrk="1" latinLnBrk="0" hangingPunct="1">
+      <a:defRPr sz="1200" kern="1200">
+        <a:solidFill>
+          <a:schemeClr val="tx1"/>
+        </a:solidFill>
+        <a:latin typeface="+mn-lt"/>
+        <a:ea typeface="+mn-ea"/>
+        <a:cs typeface="+mn-cs"/>
+      </a:defRPr>
+    </a:lvl5pPr>
+    <a:lvl6pPr marL="2286000" algn="l" defTabSz="914400" rtl="0" eaLnBrk="1" latinLnBrk="0" hangingPunct="1">
+      <a:defRPr sz="1200" kern="1200">
+        <a:solidFill>
+          <a:schemeClr val="tx1"/>
+        </a:solidFill>
+        <a:latin typeface="+mn-lt"/>
+        <a:ea typeface="+mn-ea"/>
+        <a:cs typeface="+mn-cs"/>
+      </a:defRPr>
+    </a:lvl6pPr>
+    <a:lvl7pPr marL="2743200" algn="l" defTabSz="914400" rtl="0" eaLnBrk="1" latinLnBrk="0" hangingPunct="1">
+      <a:defRPr sz="1200" kern="1200">
+        <a:solidFill>
+          <a:schemeClr val="tx1"/>
+        </a:solidFill>
+        <a:latin typeface="+mn-lt"/>
+        <a:ea typeface="+mn-ea"/>
+        <a:cs typeface="+mn-cs"/>
+      </a:defRPr>
+    </a:lvl7pPr>
+    <a:lvl8pPr marL="3200400" algn="l" defTabSz="914400" rtl="0" eaLnBrk="1" latinLnBrk="0" hangingPunct="1">
+      <a:defRPr sz="1200" kern="1200">
+        <a:solidFill>
+          <a:schemeClr val="tx1"/>
+        </a:solidFill>
+        <a:latin typeface="+mn-lt"/>
+        <a:ea typeface="+mn-ea"/>
+        <a:cs typeface="+mn-cs"/>
+      </a:defRPr>
+    </a:lvl8pPr>
+    <a:lvl9pPr marL="3657600" algn="l" defTabSz="914400" rtl="0" eaLnBrk="1" latinLnBrk="0" hangingPunct="1">
+      <a:defRPr sz="1200" kern="1200">
+        <a:solidFill>
+          <a:schemeClr val="tx1"/>
+        </a:solidFill>
+        <a:latin typeface="+mn-lt"/>
+        <a:ea typeface="+mn-ea"/>
+        <a:cs typeface="+mn-cs"/>
+      </a:defRPr>
+    </a:lvl9pPr>
+  </p:notesStyle>
+</p:notesMaster>
+</file>
+
+<file path=ppt/notesSlides/notesSlide1.xml><?xml version="1.0" encoding="utf-8"?>
+<p:notes xmlns:a="http://schemas.openxmlformats.org/drawingml/2006/main" xmlns:r="http://schemas.openxmlformats.org/officeDocument/2006/relationships" xmlns:p="http://schemas.openxmlformats.org/presentationml/2006/main">
+  <p:cSld>
+    <p:spTree>
+      <p:nvGrpSpPr>
+        <p:cNvPr id="1" name=""/>
+        <p:cNvGrpSpPr/>
+        <p:nvPr/>
+      </p:nvGrpSpPr>
+      <p:grpSpPr>
+        <a:xfrm>
+          <a:off x="0" y="0"/>
+          <a:ext cx="0" cy="0"/>
+          <a:chOff x="0" y="0"/>
+          <a:chExt cx="0" cy="0"/>
+        </a:xfrm>
+      </p:grpSpPr>
+      <p:sp>
+        <p:nvSpPr>
+          <p:cNvPr id="2" name="Slide Image Placeholder 1"/>
+          <p:cNvSpPr>
+            <a:spLocks noGrp="1" noRot="1" noChangeAspect="1"/>
+          </p:cNvSpPr>
+          <p:nvPr>
+            <p:ph type="sldImg"/>
+          </p:nvPr>
+        </p:nvSpPr>
+        <p:spPr/>
+      </p:sp>
+      <p:sp>
+        <p:nvSpPr>
+          <p:cNvPr id="3" name="Notes Placeholder 2"/>
+          <p:cNvSpPr>
+            <a:spLocks noGrp="1"/>
+          </p:cNvSpPr>
+          <p:nvPr>
+            <p:ph type="body" idx="1"/>
+          </p:nvPr>
+        </p:nvSpPr>
+        <p:spPr/>
+        <p:txBody>
+          <a:bodyPr/>
+          <a:lstStyle/>
+          <a:p>
+            <a:r>
+              <a:rPr lang="en-US" b="1" dirty="0"/>
+              <a:t>Question</a:t>
+            </a:r>
+          </a:p>
+          <a:p>
+            <a:r>
+              <a:rPr lang="en-US" dirty="0"/>
+              <a:t>Define the problem</a:t>
+            </a:r>
+          </a:p>
+          <a:p>
+            <a:r>
+              <a:rPr lang="en-US" dirty="0"/>
+              <a:t>Determine the relevant key metrics</a:t>
+            </a:r>
+          </a:p>
+          <a:p>
+            <a:r>
+              <a:rPr lang="en-US" dirty="0"/>
+              <a:t>What drives customer satisfaction?</a:t>
+            </a:r>
+          </a:p>
+          <a:p>
+            <a:r>
+              <a:rPr lang="en-US" b="1" dirty="0"/>
+              <a:t>Data Collection</a:t>
+            </a:r>
+          </a:p>
+          <a:p>
+            <a:r>
+              <a:rPr lang="en-US" dirty="0"/>
+              <a:t>Gathering data from databases, APIs, web scraping</a:t>
+            </a:r>
+          </a:p>
+          <a:p>
+            <a:r>
+              <a:rPr lang="en-US" dirty="0"/>
+              <a:t>Product reviews, delivery times</a:t>
+            </a:r>
+          </a:p>
+          <a:p>
+            <a:r>
+              <a:rPr lang="en-US" dirty="0"/>
+              <a:t>Prices &amp; discounts</a:t>
+            </a:r>
+          </a:p>
+          <a:p>
+            <a:r>
+              <a:rPr lang="en-US" b="1" dirty="0"/>
+              <a:t>Preparation</a:t>
+            </a:r>
+          </a:p>
+          <a:p>
+            <a:r>
+              <a:rPr lang="en-US" dirty="0"/>
+              <a:t>Cleaning missing or incomplete data</a:t>
+            </a:r>
+          </a:p>
+          <a:p>
+            <a:r>
+              <a:rPr lang="en-US" dirty="0"/>
+              <a:t>Transforming and structuring raw data</a:t>
+            </a:r>
+          </a:p>
+          <a:p>
+            <a:r>
+              <a:rPr lang="en-US" dirty="0"/>
+              <a:t>e.g., EUR, USD</a:t>
+            </a:r>
+          </a:p>
+          <a:p>
+            <a:r>
+              <a:rPr lang="en-US" b="1" dirty="0"/>
+              <a:t>Analysis</a:t>
+            </a:r>
+          </a:p>
+          <a:p>
+            <a:r>
+              <a:rPr lang="en-US" dirty="0"/>
+              <a:t>Statistical evaluation</a:t>
+            </a:r>
+          </a:p>
+          <a:p>
+            <a:r>
+              <a:rPr lang="en-US" dirty="0"/>
+              <a:t>Correlations</a:t>
+            </a:r>
+          </a:p>
+          <a:p>
+            <a:r>
+              <a:rPr lang="en-US" dirty="0"/>
+              <a:t>Pattern recognition</a:t>
+            </a:r>
+          </a:p>
+          <a:p>
+            <a:r>
+              <a:rPr lang="en-US" dirty="0"/>
+              <a:t>Applying models to gain insights</a:t>
+            </a:r>
+          </a:p>
+          <a:p>
+            <a:r>
+              <a:rPr lang="en-US" b="1" dirty="0"/>
+              <a:t>Sharing</a:t>
+            </a:r>
+          </a:p>
+          <a:p>
+            <a:r>
+              <a:rPr lang="en-US" dirty="0"/>
+              <a:t>Reports</a:t>
+            </a:r>
+          </a:p>
+          <a:p>
+            <a:r>
+              <a:rPr lang="en-US" dirty="0"/>
+              <a:t>Presentations</a:t>
+            </a:r>
+          </a:p>
+          <a:p>
+            <a:r>
+              <a:rPr lang="en-US" dirty="0"/>
+              <a:t>Data storytelling</a:t>
+            </a:r>
+          </a:p>
+          <a:p>
+            <a:r>
+              <a:rPr lang="en-US" dirty="0"/>
+              <a:t>Provide clear recommendations</a:t>
+            </a:r>
+          </a:p>
+          <a:p>
+            <a:endParaRPr lang="LID4096" dirty="0"/>
+          </a:p>
+        </p:txBody>
+      </p:sp>
+      <p:sp>
+        <p:nvSpPr>
+          <p:cNvPr id="4" name="Slide Number Placeholder 3"/>
+          <p:cNvSpPr>
+            <a:spLocks noGrp="1"/>
+          </p:cNvSpPr>
+          <p:nvPr>
+            <p:ph type="sldNum" sz="quarter" idx="5"/>
+          </p:nvPr>
+        </p:nvSpPr>
+        <p:spPr/>
+        <p:txBody>
+          <a:bodyPr/>
+          <a:lstStyle/>
+          <a:p>
+            <a:fld id="{60C2D7CD-EEF3-4145-A484-A9D67FF727B1}" type="slidenum">
+              <a:rPr lang="LID4096" smtClean="0"/>
+              <a:t>2</a:t>
+            </a:fld>
+            <a:endParaRPr lang="LID4096"/>
+          </a:p>
+        </p:txBody>
+      </p:sp>
+    </p:spTree>
+    <p:extLst>
+      <p:ext uri="{BB962C8B-B14F-4D97-AF65-F5344CB8AC3E}">
+        <p14:creationId xmlns:p14="http://schemas.microsoft.com/office/powerpoint/2010/main" val="886407043"/>
+      </p:ext>
+    </p:extLst>
+  </p:cSld>
+  <p:clrMapOvr>
+    <a:masterClrMapping/>
+  </p:clrMapOvr>
+</p:notes>
+</file>
+
+<file path=ppt/notesSlides/notesSlide2.xml><?xml version="1.0" encoding="utf-8"?>
+<p:notes xmlns:a="http://schemas.openxmlformats.org/drawingml/2006/main" xmlns:r="http://schemas.openxmlformats.org/officeDocument/2006/relationships" xmlns:p="http://schemas.openxmlformats.org/presentationml/2006/main">
+  <p:cSld>
+    <p:spTree>
+      <p:nvGrpSpPr>
+        <p:cNvPr id="1" name=""/>
+        <p:cNvGrpSpPr/>
+        <p:nvPr/>
+      </p:nvGrpSpPr>
+      <p:grpSpPr>
+        <a:xfrm>
+          <a:off x="0" y="0"/>
+          <a:ext cx="0" cy="0"/>
+          <a:chOff x="0" y="0"/>
+          <a:chExt cx="0" cy="0"/>
+        </a:xfrm>
+      </p:grpSpPr>
+      <p:sp>
+        <p:nvSpPr>
+          <p:cNvPr id="2" name="Slide Image Placeholder 1"/>
+          <p:cNvSpPr>
+            <a:spLocks noGrp="1" noRot="1" noChangeAspect="1"/>
+          </p:cNvSpPr>
+          <p:nvPr>
+            <p:ph type="sldImg"/>
+          </p:nvPr>
+        </p:nvSpPr>
+        <p:spPr/>
+      </p:sp>
+      <p:sp>
+        <p:nvSpPr>
+          <p:cNvPr id="3" name="Notes Placeholder 2"/>
+          <p:cNvSpPr>
+            <a:spLocks noGrp="1"/>
+          </p:cNvSpPr>
+          <p:nvPr>
+            <p:ph type="body" idx="1"/>
+          </p:nvPr>
+        </p:nvSpPr>
+        <p:spPr/>
+        <p:txBody>
+          <a:bodyPr/>
+          <a:lstStyle/>
+          <a:p>
+            <a:r>
+              <a:rPr lang="en-US" b="1" dirty="0"/>
+              <a:t>Setup, Data &amp; Data Types</a:t>
+            </a:r>
+            <a:endParaRPr lang="en-US" dirty="0"/>
+          </a:p>
+          <a:p>
+            <a:r>
+              <a:rPr lang="en-US" dirty="0"/>
+              <a:t>Install Python, Notebooks, Libraries</a:t>
+            </a:r>
+          </a:p>
+          <a:p>
+            <a:r>
+              <a:rPr lang="en-US" dirty="0"/>
+              <a:t>Overview of Data Types</a:t>
+            </a:r>
+          </a:p>
+          <a:p>
+            <a:r>
+              <a:rPr lang="en-US" dirty="0"/>
+              <a:t>Data | Information</a:t>
+            </a:r>
+          </a:p>
+          <a:p>
+            <a:r>
+              <a:rPr lang="en-US" b="1" dirty="0"/>
+              <a:t>Define Analysis Goals &amp; KPIs</a:t>
+            </a:r>
+            <a:endParaRPr lang="en-US" dirty="0"/>
+          </a:p>
+          <a:p>
+            <a:r>
+              <a:rPr lang="en-US" dirty="0"/>
+              <a:t>Identify analysis questions &amp; objectives</a:t>
+            </a:r>
+          </a:p>
+          <a:p>
+            <a:r>
+              <a:rPr lang="en-US" dirty="0"/>
+              <a:t>Link KPIs to business decisions</a:t>
+            </a:r>
+          </a:p>
+          <a:p>
+            <a:r>
+              <a:rPr lang="en-US" b="1" dirty="0"/>
+              <a:t>Data Gathering &amp; Quality</a:t>
+            </a:r>
+            <a:endParaRPr lang="en-US" dirty="0"/>
+          </a:p>
+          <a:p>
+            <a:r>
+              <a:rPr lang="en-US" dirty="0"/>
+              <a:t>Collect data: APIs, local files, unstructured data</a:t>
+            </a:r>
+          </a:p>
+          <a:p>
+            <a:r>
+              <a:rPr lang="en-US" dirty="0"/>
+              <a:t>Check completeness, accuracy, consistency</a:t>
+            </a:r>
+          </a:p>
+          <a:p>
+            <a:r>
+              <a:rPr lang="en-US" dirty="0"/>
+              <a:t>Load &amp; inspect datasets</a:t>
+            </a:r>
+          </a:p>
+          <a:p>
+            <a:r>
+              <a:rPr lang="en-US" dirty="0"/>
+              <a:t>Check for missing values, duplicates, formatting</a:t>
+            </a:r>
+          </a:p>
+          <a:p>
+            <a:r>
+              <a:rPr lang="en-US" b="1" dirty="0"/>
+              <a:t>Data Cleaning &amp; Preparation</a:t>
+            </a:r>
+            <a:endParaRPr lang="en-US" dirty="0"/>
+          </a:p>
+          <a:p>
+            <a:r>
+              <a:rPr lang="en-US" dirty="0"/>
+              <a:t>Correct missing / incorrect values</a:t>
+            </a:r>
+          </a:p>
+          <a:p>
+            <a:r>
+              <a:rPr lang="en-US" dirty="0"/>
+              <a:t>Standardize formats</a:t>
+            </a:r>
+          </a:p>
+          <a:p>
+            <a:r>
+              <a:rPr lang="en-US" dirty="0"/>
+              <a:t>Transform variables for analysis</a:t>
+            </a:r>
+          </a:p>
+          <a:p>
+            <a:r>
+              <a:rPr lang="en-US" b="1" dirty="0"/>
+              <a:t>Data Modeling &amp; Aggregation</a:t>
+            </a:r>
+            <a:endParaRPr lang="en-US" dirty="0"/>
+          </a:p>
+          <a:p>
+            <a:r>
+              <a:rPr lang="en-US" dirty="0"/>
+              <a:t>Organize data into tables &amp; relationships</a:t>
+            </a:r>
+          </a:p>
+          <a:p>
+            <a:r>
+              <a:rPr lang="en-US" dirty="0"/>
+              <a:t>Feature engineering &amp; aggregations</a:t>
+            </a:r>
+          </a:p>
+          <a:p>
+            <a:r>
+              <a:rPr lang="en-US" b="1" dirty="0"/>
+              <a:t>Descriptive Statistics &amp; KPIs</a:t>
+            </a:r>
+            <a:endParaRPr lang="en-US" dirty="0"/>
+          </a:p>
+          <a:p>
+            <a:r>
+              <a:rPr lang="en-US" dirty="0"/>
+              <a:t>Mean, Median, Mode, Standard Deviation, Range</a:t>
+            </a:r>
+          </a:p>
+          <a:p>
+            <a:r>
+              <a:rPr lang="en-US" dirty="0"/>
+              <a:t>Correlations &amp; Cross-tabs</a:t>
+            </a:r>
+          </a:p>
+          <a:p>
+            <a:r>
+              <a:rPr lang="en-US" b="1" dirty="0"/>
+              <a:t>Data Visualization</a:t>
+            </a:r>
+            <a:endParaRPr lang="en-US" dirty="0"/>
+          </a:p>
+          <a:p>
+            <a:r>
+              <a:rPr lang="en-US" dirty="0"/>
+              <a:t>Classic charts: Bar chart, Histogram, Boxplot, Line chart, Scatter plot</a:t>
+            </a:r>
+          </a:p>
+          <a:p>
+            <a:r>
+              <a:rPr lang="en-US" dirty="0"/>
+              <a:t>Interactive charts</a:t>
+            </a:r>
+          </a:p>
+          <a:p>
+            <a:r>
+              <a:rPr lang="en-US" b="1" dirty="0"/>
+              <a:t>Analytics Workflow &amp; Integration</a:t>
+            </a:r>
+            <a:endParaRPr lang="en-US" dirty="0"/>
+          </a:p>
+          <a:p>
+            <a:r>
+              <a:rPr lang="en-US" dirty="0"/>
+              <a:t>Structured workflow</a:t>
+            </a:r>
+          </a:p>
+          <a:p>
+            <a:r>
+              <a:rPr lang="en-US" dirty="0"/>
+              <a:t>Mini case studies using all previous steps</a:t>
+            </a:r>
+          </a:p>
+          <a:p>
+            <a:r>
+              <a:rPr lang="en-US" b="1" dirty="0"/>
+              <a:t>Capstone End-to-End Project</a:t>
+            </a:r>
+            <a:endParaRPr lang="en-US" dirty="0"/>
+          </a:p>
+          <a:p>
+            <a:r>
+              <a:rPr lang="en-US" dirty="0"/>
+              <a:t>Complete analysis from question to presentation</a:t>
+            </a:r>
+          </a:p>
+          <a:p>
+            <a:r>
+              <a:rPr lang="en-US" dirty="0"/>
+              <a:t>Apply all learned steps</a:t>
+            </a:r>
+          </a:p>
+          <a:p>
+            <a:r>
+              <a:rPr lang="en-US" dirty="0"/>
+              <a:t>Present &amp; discuss results</a:t>
+            </a:r>
+          </a:p>
+        </p:txBody>
+      </p:sp>
+      <p:sp>
+        <p:nvSpPr>
+          <p:cNvPr id="4" name="Slide Number Placeholder 3"/>
+          <p:cNvSpPr>
+            <a:spLocks noGrp="1"/>
+          </p:cNvSpPr>
+          <p:nvPr>
+            <p:ph type="sldNum" sz="quarter" idx="5"/>
+          </p:nvPr>
+        </p:nvSpPr>
+        <p:spPr/>
+        <p:txBody>
+          <a:bodyPr/>
+          <a:lstStyle/>
+          <a:p>
+            <a:fld id="{60C2D7CD-EEF3-4145-A484-A9D67FF727B1}" type="slidenum">
+              <a:rPr lang="LID4096" smtClean="0"/>
+              <a:t>3</a:t>
+            </a:fld>
+            <a:endParaRPr lang="LID4096"/>
+          </a:p>
+        </p:txBody>
+      </p:sp>
+    </p:spTree>
+    <p:extLst>
+      <p:ext uri="{BB962C8B-B14F-4D97-AF65-F5344CB8AC3E}">
+        <p14:creationId xmlns:p14="http://schemas.microsoft.com/office/powerpoint/2010/main" val="2248453732"/>
+      </p:ext>
+    </p:extLst>
+  </p:cSld>
+  <p:clrMapOvr>
+    <a:masterClrMapping/>
+  </p:clrMapOvr>
+</p:notes>
+</file>
+
+<file path=ppt/notesSlides/notesSlide3.xml><?xml version="1.0" encoding="utf-8"?>
+<p:notes xmlns:a="http://schemas.openxmlformats.org/drawingml/2006/main" xmlns:r="http://schemas.openxmlformats.org/officeDocument/2006/relationships" xmlns:p="http://schemas.openxmlformats.org/presentationml/2006/main">
+  <p:cSld>
+    <p:spTree>
+      <p:nvGrpSpPr>
+        <p:cNvPr id="1" name=""/>
+        <p:cNvGrpSpPr/>
+        <p:nvPr/>
+      </p:nvGrpSpPr>
+      <p:grpSpPr>
+        <a:xfrm>
+          <a:off x="0" y="0"/>
+          <a:ext cx="0" cy="0"/>
+          <a:chOff x="0" y="0"/>
+          <a:chExt cx="0" cy="0"/>
+        </a:xfrm>
+      </p:grpSpPr>
+      <p:sp>
+        <p:nvSpPr>
+          <p:cNvPr id="2" name="Slide Image Placeholder 1"/>
+          <p:cNvSpPr>
+            <a:spLocks noGrp="1" noRot="1" noChangeAspect="1"/>
+          </p:cNvSpPr>
+          <p:nvPr>
+            <p:ph type="sldImg"/>
+          </p:nvPr>
+        </p:nvSpPr>
+        <p:spPr/>
+      </p:sp>
+      <p:sp>
+        <p:nvSpPr>
+          <p:cNvPr id="3" name="Notes Placeholder 2"/>
+          <p:cNvSpPr>
+            <a:spLocks noGrp="1"/>
+          </p:cNvSpPr>
+          <p:nvPr>
+            <p:ph type="body" idx="1"/>
+          </p:nvPr>
+        </p:nvSpPr>
+        <p:spPr/>
+        <p:txBody>
+          <a:bodyPr/>
+          <a:lstStyle/>
+          <a:p>
+            <a:endParaRPr lang="LID4096" dirty="0"/>
+          </a:p>
+        </p:txBody>
+      </p:sp>
+      <p:sp>
+        <p:nvSpPr>
+          <p:cNvPr id="4" name="Slide Number Placeholder 3"/>
+          <p:cNvSpPr>
+            <a:spLocks noGrp="1"/>
+          </p:cNvSpPr>
+          <p:nvPr>
+            <p:ph type="sldNum" sz="quarter" idx="5"/>
+          </p:nvPr>
+        </p:nvSpPr>
+        <p:spPr/>
+        <p:txBody>
+          <a:bodyPr/>
+          <a:lstStyle/>
+          <a:p>
+            <a:fld id="{60C2D7CD-EEF3-4145-A484-A9D67FF727B1}" type="slidenum">
+              <a:rPr lang="LID4096" smtClean="0"/>
+              <a:t>4</a:t>
+            </a:fld>
+            <a:endParaRPr lang="LID4096"/>
+          </a:p>
+        </p:txBody>
+      </p:sp>
+    </p:spTree>
+    <p:extLst>
+      <p:ext uri="{BB962C8B-B14F-4D97-AF65-F5344CB8AC3E}">
+        <p14:creationId xmlns:p14="http://schemas.microsoft.com/office/powerpoint/2010/main" val="4131942357"/>
+      </p:ext>
+    </p:extLst>
+  </p:cSld>
+  <p:clrMapOvr>
+    <a:masterClrMapping/>
+  </p:clrMapOvr>
+</p:notes>
 </file>
 
 <file path=ppt/slideLayouts/slideLayout1.xml><?xml version="1.0" encoding="utf-8"?>
@@ -258,7 +1199,7 @@
           <a:p>
             <a:fld id="{6F5A3FF9-0028-4556-8BB5-EE36D45F941B}" type="datetimeFigureOut">
               <a:rPr lang="LID4096" smtClean="0"/>
-              <a:t>02/20/2026</a:t>
+              <a:t>02/21/2026</a:t>
             </a:fld>
             <a:endParaRPr lang="LID4096"/>
           </a:p>
@@ -458,7 +1399,7 @@
           <a:p>
             <a:fld id="{6F5A3FF9-0028-4556-8BB5-EE36D45F941B}" type="datetimeFigureOut">
               <a:rPr lang="LID4096" smtClean="0"/>
-              <a:t>02/20/2026</a:t>
+              <a:t>02/21/2026</a:t>
             </a:fld>
             <a:endParaRPr lang="LID4096"/>
           </a:p>
@@ -668,7 +1609,7 @@
           <a:p>
             <a:fld id="{6F5A3FF9-0028-4556-8BB5-EE36D45F941B}" type="datetimeFigureOut">
               <a:rPr lang="LID4096" smtClean="0"/>
-              <a:t>02/20/2026</a:t>
+              <a:t>02/21/2026</a:t>
             </a:fld>
             <a:endParaRPr lang="LID4096"/>
           </a:p>
@@ -868,7 +1809,7 @@
           <a:p>
             <a:fld id="{6F5A3FF9-0028-4556-8BB5-EE36D45F941B}" type="datetimeFigureOut">
               <a:rPr lang="LID4096" smtClean="0"/>
-              <a:t>02/20/2026</a:t>
+              <a:t>02/21/2026</a:t>
             </a:fld>
             <a:endParaRPr lang="LID4096"/>
           </a:p>
@@ -1144,7 +2085,7 @@
           <a:p>
             <a:fld id="{6F5A3FF9-0028-4556-8BB5-EE36D45F941B}" type="datetimeFigureOut">
               <a:rPr lang="LID4096" smtClean="0"/>
-              <a:t>02/20/2026</a:t>
+              <a:t>02/21/2026</a:t>
             </a:fld>
             <a:endParaRPr lang="LID4096"/>
           </a:p>
@@ -1412,7 +2353,7 @@
           <a:p>
             <a:fld id="{6F5A3FF9-0028-4556-8BB5-EE36D45F941B}" type="datetimeFigureOut">
               <a:rPr lang="LID4096" smtClean="0"/>
-              <a:t>02/20/2026</a:t>
+              <a:t>02/21/2026</a:t>
             </a:fld>
             <a:endParaRPr lang="LID4096"/>
           </a:p>
@@ -1827,7 +2768,7 @@
           <a:p>
             <a:fld id="{6F5A3FF9-0028-4556-8BB5-EE36D45F941B}" type="datetimeFigureOut">
               <a:rPr lang="LID4096" smtClean="0"/>
-              <a:t>02/20/2026</a:t>
+              <a:t>02/21/2026</a:t>
             </a:fld>
             <a:endParaRPr lang="LID4096"/>
           </a:p>
@@ -1969,7 +2910,7 @@
           <a:p>
             <a:fld id="{6F5A3FF9-0028-4556-8BB5-EE36D45F941B}" type="datetimeFigureOut">
               <a:rPr lang="LID4096" smtClean="0"/>
-              <a:t>02/20/2026</a:t>
+              <a:t>02/21/2026</a:t>
             </a:fld>
             <a:endParaRPr lang="LID4096"/>
           </a:p>
@@ -2082,7 +3023,7 @@
           <a:p>
             <a:fld id="{6F5A3FF9-0028-4556-8BB5-EE36D45F941B}" type="datetimeFigureOut">
               <a:rPr lang="LID4096" smtClean="0"/>
-              <a:t>02/20/2026</a:t>
+              <a:t>02/21/2026</a:t>
             </a:fld>
             <a:endParaRPr lang="LID4096"/>
           </a:p>
@@ -2395,7 +3336,7 @@
           <a:p>
             <a:fld id="{6F5A3FF9-0028-4556-8BB5-EE36D45F941B}" type="datetimeFigureOut">
               <a:rPr lang="LID4096" smtClean="0"/>
-              <a:t>02/20/2026</a:t>
+              <a:t>02/21/2026</a:t>
             </a:fld>
             <a:endParaRPr lang="LID4096"/>
           </a:p>
@@ -2684,7 +3625,7 @@
           <a:p>
             <a:fld id="{6F5A3FF9-0028-4556-8BB5-EE36D45F941B}" type="datetimeFigureOut">
               <a:rPr lang="LID4096" smtClean="0"/>
-              <a:t>02/20/2026</a:t>
+              <a:t>02/21/2026</a:t>
             </a:fld>
             <a:endParaRPr lang="LID4096"/>
           </a:p>
@@ -2927,7 +3868,7 @@
           <a:p>
             <a:fld id="{6F5A3FF9-0028-4556-8BB5-EE36D45F941B}" type="datetimeFigureOut">
               <a:rPr lang="LID4096" smtClean="0"/>
-              <a:t>02/20/2026</a:t>
+              <a:t>02/21/2026</a:t>
             </a:fld>
             <a:endParaRPr lang="LID4096"/>
           </a:p>
@@ -3475,175 +4416,961 @@
       </p:grpSpPr>
       <p:sp>
         <p:nvSpPr>
-          <p:cNvPr id="3" name="Content Placeholder 2">
+          <p:cNvPr id="35" name="Rectangle: Rounded Corners 34">
             <a:extLst>
               <a:ext uri="{FF2B5EF4-FFF2-40B4-BE49-F238E27FC236}">
-                <a16:creationId xmlns:a16="http://schemas.microsoft.com/office/drawing/2014/main" id="{D24A6A79-3955-5F94-A047-9E915C30B584}"/>
+                <a16:creationId xmlns:a16="http://schemas.microsoft.com/office/drawing/2014/main" id="{B43AF4DC-A281-4750-7689-04550908EEE8}"/>
               </a:ext>
             </a:extLst>
           </p:cNvPr>
-          <p:cNvSpPr>
-            <a:spLocks noGrp="1"/>
-          </p:cNvSpPr>
-          <p:nvPr>
-            <p:ph idx="1"/>
-          </p:nvPr>
-        </p:nvSpPr>
-        <p:spPr/>
-        <p:txBody>
-          <a:bodyPr>
-            <a:normAutofit fontScale="77500" lnSpcReduction="20000"/>
-          </a:bodyPr>
+          <p:cNvSpPr/>
+          <p:nvPr/>
+        </p:nvSpPr>
+        <p:spPr>
+          <a:xfrm>
+            <a:off x="496213" y="1024616"/>
+            <a:ext cx="2067374" cy="4833257"/>
+          </a:xfrm>
+          <a:prstGeom prst="roundRect">
+            <a:avLst/>
+          </a:prstGeom>
+          <a:solidFill>
+            <a:schemeClr val="accent4">
+              <a:lumMod val="60000"/>
+              <a:lumOff val="40000"/>
+            </a:schemeClr>
+          </a:solidFill>
+          <a:ln>
+            <a:noFill/>
+          </a:ln>
+        </p:spPr>
+        <p:style>
+          <a:lnRef idx="2">
+            <a:schemeClr val="accent1">
+              <a:shade val="15000"/>
+            </a:schemeClr>
+          </a:lnRef>
+          <a:fillRef idx="1">
+            <a:schemeClr val="accent1"/>
+          </a:fillRef>
+          <a:effectRef idx="0">
+            <a:schemeClr val="accent1"/>
+          </a:effectRef>
+          <a:fontRef idx="minor">
+            <a:schemeClr val="lt1"/>
+          </a:fontRef>
+        </p:style>
+        <p:txBody>
+          <a:bodyPr rtlCol="0" anchor="ctr"/>
           <a:lstStyle/>
           <a:p>
-            <a:r>
-              <a:rPr lang="en-US" b="1" dirty="0"/>
-              <a:t>Week 1 = Core Analytical Thinking</a:t>
-            </a:r>
-          </a:p>
-          <a:p>
-            <a:r>
-              <a:rPr lang="en-US" dirty="0"/>
-              <a:t>Day 1: Setup | Data &amp; Types</a:t>
-            </a:r>
-          </a:p>
-          <a:p>
-            <a:r>
-              <a:rPr lang="en-US" dirty="0"/>
-              <a:t>Day 2: Data Collection &amp; Quality</a:t>
-            </a:r>
-          </a:p>
-          <a:p>
-            <a:r>
-              <a:rPr lang="en-US" b="1" dirty="0"/>
-              <a:t>Day 3: Descriptive Statistics I (Concepts)</a:t>
-            </a:r>
-            <a:endParaRPr lang="en-US" dirty="0"/>
-          </a:p>
-          <a:p>
-            <a:r>
-              <a:rPr lang="en-US" b="1" dirty="0"/>
-              <a:t>Day 4: Descriptive Statistics II (Practice + Interpretation)</a:t>
-            </a:r>
-            <a:endParaRPr lang="en-US" dirty="0"/>
-          </a:p>
-          <a:p>
-            <a:r>
-              <a:rPr lang="en-US" b="1" dirty="0"/>
-              <a:t>Day 5: Visualization I (Principles + Chart Types)</a:t>
-            </a:r>
-            <a:endParaRPr lang="en-US" dirty="0"/>
-          </a:p>
-          <a:p>
-            <a:r>
-              <a:rPr lang="en-US" b="1" dirty="0"/>
-              <a:t>Week 2</a:t>
-            </a:r>
-          </a:p>
-          <a:p>
-            <a:r>
-              <a:rPr lang="en-US" b="1" dirty="0"/>
-              <a:t>Day 6: Visualization II (Hands-on + Storytelling)</a:t>
-            </a:r>
-            <a:endParaRPr lang="en-US" dirty="0"/>
-          </a:p>
-          <a:p>
-            <a:r>
-              <a:rPr lang="en-US" dirty="0"/>
-              <a:t>Day 7: KPIs &amp; Business Context</a:t>
-            </a:r>
-          </a:p>
-          <a:p>
-            <a:r>
-              <a:rPr lang="en-US" dirty="0"/>
-              <a:t>Day 8: Analytics Workflow (CRISP-DM)</a:t>
-            </a:r>
-          </a:p>
-          <a:p>
-            <a:r>
-              <a:rPr lang="en-US" dirty="0"/>
-              <a:t>Day 9: Data Modeling Basics</a:t>
-            </a:r>
-          </a:p>
-          <a:p>
-            <a:r>
-              <a:rPr lang="en-US" dirty="0"/>
-              <a:t>Day 10: Case Study</a:t>
-            </a:r>
-          </a:p>
-          <a:p>
-            <a:endParaRPr lang="LID4096" dirty="0"/>
-          </a:p>
-        </p:txBody>
-      </p:sp>
-      <p:sp>
-        <p:nvSpPr>
-          <p:cNvPr id="4" name="Subtitle 2">
+            <a:pPr algn="ctr"/>
+            <a:endParaRPr lang="LID4096"/>
+          </a:p>
+        </p:txBody>
+      </p:sp>
+      <p:pic>
+        <p:nvPicPr>
+          <p:cNvPr id="7" name="Graphic 6" descr="Question mark">
             <a:extLst>
               <a:ext uri="{FF2B5EF4-FFF2-40B4-BE49-F238E27FC236}">
-                <a16:creationId xmlns:a16="http://schemas.microsoft.com/office/drawing/2014/main" id="{FE8D483F-DD01-6E97-87D3-7D099C40F1AF}"/>
+                <a16:creationId xmlns:a16="http://schemas.microsoft.com/office/drawing/2014/main" id="{3CD82926-BF69-61BA-A2B8-AE13D076995C}"/>
               </a:ext>
             </a:extLst>
           </p:cNvPr>
-          <p:cNvSpPr>
-            <a:spLocks noGrp="1"/>
-          </p:cNvSpPr>
-          <p:nvPr>
-            <p:ph type="title"/>
-          </p:nvPr>
-        </p:nvSpPr>
+          <p:cNvPicPr>
+            <a:picLocks noChangeAspect="1"/>
+          </p:cNvPicPr>
+          <p:nvPr/>
+        </p:nvPicPr>
+        <p:blipFill>
+          <a:blip r:embed="rId3">
+            <a:extLst>
+              <a:ext uri="{96DAC541-7B7A-43D3-8B79-37D633B846F1}">
+                <asvg:svgBlip xmlns:asvg="http://schemas.microsoft.com/office/drawing/2016/SVG/main" r:embed="rId4"/>
+              </a:ext>
+            </a:extLst>
+          </a:blip>
+          <a:stretch>
+            <a:fillRect/>
+          </a:stretch>
+        </p:blipFill>
         <p:spPr>
           <a:xfrm>
-            <a:off x="838200" y="365125"/>
-            <a:ext cx="10515600" cy="1325563"/>
+            <a:off x="1072700" y="1455763"/>
+            <a:ext cx="914400" cy="914400"/>
           </a:xfrm>
+          <a:prstGeom prst="rect">
+            <a:avLst/>
+          </a:prstGeom>
         </p:spPr>
-        <p:txBody>
-          <a:bodyPr>
-            <a:normAutofit/>
+      </p:pic>
+      <p:sp>
+        <p:nvSpPr>
+          <p:cNvPr id="20" name="TextBox 19">
+            <a:extLst>
+              <a:ext uri="{FF2B5EF4-FFF2-40B4-BE49-F238E27FC236}">
+                <a16:creationId xmlns:a16="http://schemas.microsoft.com/office/drawing/2014/main" id="{8F748B9C-7513-93B1-01D3-D7DFFC032034}"/>
+              </a:ext>
+            </a:extLst>
+          </p:cNvPr>
+          <p:cNvSpPr txBox="1"/>
+          <p:nvPr/>
+        </p:nvSpPr>
+        <p:spPr>
+          <a:xfrm>
+            <a:off x="776675" y="2512330"/>
+            <a:ext cx="1506450" cy="2739211"/>
+          </a:xfrm>
+          <a:prstGeom prst="rect">
+            <a:avLst/>
+          </a:prstGeom>
+          <a:noFill/>
+        </p:spPr>
+        <p:txBody>
+          <a:bodyPr wrap="square" rtlCol="0">
+            <a:spAutoFit/>
           </a:bodyPr>
           <a:lstStyle/>
           <a:p>
-            <a:r>
-              <a:rPr lang="en-US" sz="4000" b="1" dirty="0" err="1">
-                <a:latin typeface="+mn-lt"/>
-              </a:rPr>
-              <a:t>Methodische</a:t>
-            </a:r>
-            <a:r>
-              <a:rPr lang="en-US" sz="4000" b="1" dirty="0">
-                <a:latin typeface="+mn-lt"/>
-              </a:rPr>
+            <a:pPr algn="ctr"/>
+            <a:r>
+              <a:rPr lang="en-US" sz="1600" b="1" dirty="0" err="1"/>
+              <a:t>Fragestellung</a:t>
+            </a:r>
+            <a:endParaRPr lang="en-US" sz="1600" b="1" dirty="0"/>
+          </a:p>
+          <a:p>
+            <a:endParaRPr lang="en-US" sz="1600" dirty="0"/>
+          </a:p>
+          <a:p>
+            <a:pPr algn="ctr"/>
+            <a:r>
+              <a:rPr lang="de-DE" sz="1400" dirty="0"/>
+              <a:t>Festlegung des Problems</a:t>
+            </a:r>
+          </a:p>
+          <a:p>
+            <a:pPr algn="ctr"/>
+            <a:endParaRPr lang="de-DE" sz="1400" dirty="0"/>
+          </a:p>
+          <a:p>
+            <a:pPr algn="ctr"/>
+            <a:r>
+              <a:rPr lang="en-US" sz="1400" dirty="0" err="1"/>
+              <a:t>Bestimmung</a:t>
+            </a:r>
+            <a:r>
+              <a:rPr lang="en-US" sz="1400" dirty="0"/>
+              <a:t> der </a:t>
+            </a:r>
+            <a:r>
+              <a:rPr lang="en-US" sz="1400" dirty="0" err="1"/>
+              <a:t>relevanten</a:t>
+            </a:r>
+            <a:r>
+              <a:rPr lang="en-US" sz="1400" dirty="0"/>
               <a:t> </a:t>
             </a:r>
             <a:r>
-              <a:rPr lang="en-US" sz="4000" b="1" dirty="0" err="1">
-                <a:latin typeface="+mn-lt"/>
-              </a:rPr>
-              <a:t>Grundlagen</a:t>
-            </a:r>
-            <a:r>
-              <a:rPr lang="en-US" sz="4000" b="1" dirty="0">
-                <a:latin typeface="+mn-lt"/>
-              </a:rPr>
-              <a:t> der </a:t>
-            </a:r>
-            <a:r>
-              <a:rPr lang="en-US" sz="4000" b="1" dirty="0" err="1">
-                <a:latin typeface="+mn-lt"/>
-              </a:rPr>
-              <a:t>Datenanalyse</a:t>
-            </a:r>
-            <a:endParaRPr lang="en-US" sz="4000" b="1" dirty="0">
-              <a:latin typeface="+mn-lt"/>
-            </a:endParaRPr>
+              <a:rPr lang="en-US" sz="1400" dirty="0" err="1"/>
+              <a:t>Kennzahlen</a:t>
+            </a:r>
+            <a:endParaRPr lang="en-US" sz="1400" dirty="0"/>
+          </a:p>
+          <a:p>
+            <a:pPr algn="ctr"/>
+            <a:endParaRPr lang="en-US" sz="1400" dirty="0"/>
+          </a:p>
+          <a:p>
+            <a:pPr algn="ctr"/>
+            <a:r>
+              <a:rPr lang="en-US" sz="1400" dirty="0"/>
+              <a:t>Was </a:t>
+            </a:r>
+            <a:r>
+              <a:rPr lang="en-US" sz="1400" dirty="0" err="1"/>
+              <a:t>treibt</a:t>
+            </a:r>
+            <a:r>
+              <a:rPr lang="en-US" sz="1400" dirty="0"/>
+              <a:t> die Kunden </a:t>
+            </a:r>
+            <a:r>
+              <a:rPr lang="en-US" sz="1400" dirty="0" err="1"/>
+              <a:t>zufriedenheit</a:t>
+            </a:r>
+            <a:r>
+              <a:rPr lang="en-US" sz="1400" dirty="0"/>
+              <a:t>?</a:t>
+            </a:r>
+            <a:endParaRPr lang="LID4096" sz="1400" dirty="0"/>
+          </a:p>
+        </p:txBody>
+      </p:sp>
+      <p:sp>
+        <p:nvSpPr>
+          <p:cNvPr id="36" name="Rectangle: Rounded Corners 35">
+            <a:extLst>
+              <a:ext uri="{FF2B5EF4-FFF2-40B4-BE49-F238E27FC236}">
+                <a16:creationId xmlns:a16="http://schemas.microsoft.com/office/drawing/2014/main" id="{62E64AC7-D27B-6A45-ACD8-B06D8517723B}"/>
+              </a:ext>
+            </a:extLst>
+          </p:cNvPr>
+          <p:cNvSpPr/>
+          <p:nvPr/>
+        </p:nvSpPr>
+        <p:spPr>
+          <a:xfrm>
+            <a:off x="2771466" y="1024616"/>
+            <a:ext cx="2067374" cy="4833257"/>
+          </a:xfrm>
+          <a:prstGeom prst="roundRect">
+            <a:avLst/>
+          </a:prstGeom>
+          <a:solidFill>
+            <a:schemeClr val="accent1">
+              <a:lumMod val="40000"/>
+              <a:lumOff val="60000"/>
+            </a:schemeClr>
+          </a:solidFill>
+          <a:ln>
+            <a:noFill/>
+          </a:ln>
+        </p:spPr>
+        <p:style>
+          <a:lnRef idx="2">
+            <a:schemeClr val="accent1">
+              <a:shade val="15000"/>
+            </a:schemeClr>
+          </a:lnRef>
+          <a:fillRef idx="1">
+            <a:schemeClr val="accent1"/>
+          </a:fillRef>
+          <a:effectRef idx="0">
+            <a:schemeClr val="accent1"/>
+          </a:effectRef>
+          <a:fontRef idx="minor">
+            <a:schemeClr val="lt1"/>
+          </a:fontRef>
+        </p:style>
+        <p:txBody>
+          <a:bodyPr rtlCol="0" anchor="ctr"/>
+          <a:lstStyle/>
+          <a:p>
+            <a:pPr algn="ctr"/>
+            <a:endParaRPr lang="LID4096"/>
+          </a:p>
+        </p:txBody>
+      </p:sp>
+      <p:grpSp>
+        <p:nvGrpSpPr>
+          <p:cNvPr id="30" name="Group 29">
+            <a:extLst>
+              <a:ext uri="{FF2B5EF4-FFF2-40B4-BE49-F238E27FC236}">
+                <a16:creationId xmlns:a16="http://schemas.microsoft.com/office/drawing/2014/main" id="{50F39061-D5C5-812E-6950-4B8E8B63B5CD}"/>
+              </a:ext>
+            </a:extLst>
+          </p:cNvPr>
+          <p:cNvGrpSpPr/>
+          <p:nvPr/>
+        </p:nvGrpSpPr>
+        <p:grpSpPr>
+          <a:xfrm>
+            <a:off x="2802728" y="1455763"/>
+            <a:ext cx="2004850" cy="3118670"/>
+            <a:chOff x="2521648" y="1455763"/>
+            <a:chExt cx="2004850" cy="3118670"/>
+          </a:xfrm>
+        </p:grpSpPr>
+        <p:pic>
+          <p:nvPicPr>
+            <p:cNvPr id="9" name="Graphic 8" descr="Database">
+              <a:extLst>
+                <a:ext uri="{FF2B5EF4-FFF2-40B4-BE49-F238E27FC236}">
+                  <a16:creationId xmlns:a16="http://schemas.microsoft.com/office/drawing/2014/main" id="{476B54AC-BFD5-F800-D135-AD5B57514D10}"/>
+                </a:ext>
+              </a:extLst>
+            </p:cNvPr>
+            <p:cNvPicPr>
+              <a:picLocks noChangeAspect="1"/>
+            </p:cNvPicPr>
+            <p:nvPr/>
+          </p:nvPicPr>
+          <p:blipFill>
+            <a:blip r:embed="rId5">
+              <a:extLst>
+                <a:ext uri="{96DAC541-7B7A-43D3-8B79-37D633B846F1}">
+                  <asvg:svgBlip xmlns:asvg="http://schemas.microsoft.com/office/drawing/2016/SVG/main" r:embed="rId6"/>
+                </a:ext>
+              </a:extLst>
+            </a:blip>
+            <a:stretch>
+              <a:fillRect/>
+            </a:stretch>
+          </p:blipFill>
+          <p:spPr>
+            <a:xfrm>
+              <a:off x="3066873" y="1455763"/>
+              <a:ext cx="914400" cy="914400"/>
+            </a:xfrm>
+            <a:prstGeom prst="rect">
+              <a:avLst/>
+            </a:prstGeom>
+          </p:spPr>
+        </p:pic>
+        <p:sp>
+          <p:nvSpPr>
+            <p:cNvPr id="21" name="TextBox 20">
+              <a:extLst>
+                <a:ext uri="{FF2B5EF4-FFF2-40B4-BE49-F238E27FC236}">
+                  <a16:creationId xmlns:a16="http://schemas.microsoft.com/office/drawing/2014/main" id="{D8DFA633-3341-86B8-27F8-C87ACA044166}"/>
+                </a:ext>
+              </a:extLst>
+            </p:cNvPr>
+            <p:cNvSpPr txBox="1"/>
+            <p:nvPr/>
+          </p:nvSpPr>
+          <p:spPr>
+            <a:xfrm>
+              <a:off x="2521648" y="2512330"/>
+              <a:ext cx="2004850" cy="2062103"/>
+            </a:xfrm>
+            <a:prstGeom prst="rect">
+              <a:avLst/>
+            </a:prstGeom>
+            <a:noFill/>
+          </p:spPr>
+          <p:txBody>
+            <a:bodyPr wrap="square" rtlCol="0">
+              <a:spAutoFit/>
+            </a:bodyPr>
+            <a:lstStyle/>
+            <a:p>
+              <a:pPr algn="ctr"/>
+              <a:r>
+                <a:rPr lang="de-DE" sz="1600" b="1" dirty="0"/>
+                <a:t>Erhebung</a:t>
+              </a:r>
+            </a:p>
+            <a:p>
+              <a:pPr algn="ctr"/>
+              <a:endParaRPr lang="de-DE" sz="1400" dirty="0"/>
+            </a:p>
+            <a:p>
+              <a:pPr algn="ctr"/>
+              <a:r>
+                <a:rPr lang="de-DE" sz="1400" dirty="0"/>
+                <a:t>Sammlung von Daten</a:t>
+              </a:r>
+            </a:p>
+            <a:p>
+              <a:pPr algn="ctr"/>
+              <a:r>
+                <a:rPr lang="de-DE" sz="1400" dirty="0"/>
+                <a:t>Datenbanken, APIs, Web </a:t>
+              </a:r>
+              <a:r>
+                <a:rPr lang="de-DE" sz="1400" dirty="0" err="1"/>
+                <a:t>Scraping</a:t>
+              </a:r>
+              <a:endParaRPr lang="de-DE" sz="1400" dirty="0"/>
+            </a:p>
+            <a:p>
+              <a:pPr algn="ctr"/>
+              <a:endParaRPr lang="de-DE" sz="1400" dirty="0"/>
+            </a:p>
+            <a:p>
+              <a:pPr algn="ctr"/>
+              <a:r>
+                <a:rPr lang="en-US" sz="1400" dirty="0" err="1"/>
+                <a:t>Produktbewertungen</a:t>
+              </a:r>
+              <a:endParaRPr lang="en-US" sz="1400" dirty="0"/>
+            </a:p>
+            <a:p>
+              <a:pPr algn="ctr"/>
+              <a:r>
+                <a:rPr lang="en-US" sz="1400" dirty="0" err="1"/>
+                <a:t>Lieferzeiten</a:t>
+              </a:r>
+              <a:endParaRPr lang="en-US" sz="1400" dirty="0"/>
+            </a:p>
+            <a:p>
+              <a:pPr algn="ctr"/>
+              <a:r>
+                <a:rPr lang="en-US" sz="1400" dirty="0" err="1"/>
+                <a:t>Preise</a:t>
+              </a:r>
+              <a:r>
+                <a:rPr lang="en-US" sz="1400" dirty="0"/>
+                <a:t> &amp; </a:t>
+              </a:r>
+              <a:r>
+                <a:rPr lang="en-US" sz="1400" dirty="0" err="1"/>
+                <a:t>Rabatte</a:t>
+              </a:r>
+              <a:endParaRPr lang="en-US" sz="1400" dirty="0"/>
+            </a:p>
+          </p:txBody>
+        </p:sp>
+      </p:grpSp>
+      <p:sp>
+        <p:nvSpPr>
+          <p:cNvPr id="37" name="Rectangle: Rounded Corners 36">
+            <a:extLst>
+              <a:ext uri="{FF2B5EF4-FFF2-40B4-BE49-F238E27FC236}">
+                <a16:creationId xmlns:a16="http://schemas.microsoft.com/office/drawing/2014/main" id="{71494EC8-C6E2-9439-105B-EAC73E3DA858}"/>
+              </a:ext>
+            </a:extLst>
+          </p:cNvPr>
+          <p:cNvSpPr/>
+          <p:nvPr/>
+        </p:nvSpPr>
+        <p:spPr>
+          <a:xfrm>
+            <a:off x="5046719" y="1024616"/>
+            <a:ext cx="2067374" cy="4833257"/>
+          </a:xfrm>
+          <a:prstGeom prst="roundRect">
+            <a:avLst/>
+          </a:prstGeom>
+          <a:solidFill>
+            <a:schemeClr val="accent2">
+              <a:lumMod val="60000"/>
+              <a:lumOff val="40000"/>
+            </a:schemeClr>
+          </a:solidFill>
+          <a:ln>
+            <a:noFill/>
+          </a:ln>
+        </p:spPr>
+        <p:style>
+          <a:lnRef idx="2">
+            <a:schemeClr val="accent1">
+              <a:shade val="15000"/>
+            </a:schemeClr>
+          </a:lnRef>
+          <a:fillRef idx="1">
+            <a:schemeClr val="accent1"/>
+          </a:fillRef>
+          <a:effectRef idx="0">
+            <a:schemeClr val="accent1"/>
+          </a:effectRef>
+          <a:fontRef idx="minor">
+            <a:schemeClr val="lt1"/>
+          </a:fontRef>
+        </p:style>
+        <p:txBody>
+          <a:bodyPr rtlCol="0" anchor="ctr"/>
+          <a:lstStyle/>
+          <a:p>
+            <a:pPr algn="ctr"/>
+            <a:endParaRPr lang="LID4096"/>
+          </a:p>
+        </p:txBody>
+      </p:sp>
+      <p:pic>
+        <p:nvPicPr>
+          <p:cNvPr id="19" name="Graphic 18" descr="Checklist">
+            <a:extLst>
+              <a:ext uri="{FF2B5EF4-FFF2-40B4-BE49-F238E27FC236}">
+                <a16:creationId xmlns:a16="http://schemas.microsoft.com/office/drawing/2014/main" id="{5674ACFB-94AF-E452-F96B-AA1A76DC1C9B}"/>
+              </a:ext>
+            </a:extLst>
+          </p:cNvPr>
+          <p:cNvPicPr>
+            <a:picLocks noChangeAspect="1"/>
+          </p:cNvPicPr>
+          <p:nvPr/>
+        </p:nvPicPr>
+        <p:blipFill>
+          <a:blip r:embed="rId7">
+            <a:extLst>
+              <a:ext uri="{96DAC541-7B7A-43D3-8B79-37D633B846F1}">
+                <asvg:svgBlip xmlns:asvg="http://schemas.microsoft.com/office/drawing/2016/SVG/main" r:embed="rId8"/>
+              </a:ext>
+            </a:extLst>
+          </a:blip>
+          <a:stretch>
+            <a:fillRect/>
+          </a:stretch>
+        </p:blipFill>
+        <p:spPr>
+          <a:xfrm>
+            <a:off x="5623206" y="1455763"/>
+            <a:ext cx="914400" cy="914400"/>
+          </a:xfrm>
+          <a:prstGeom prst="rect">
+            <a:avLst/>
+          </a:prstGeom>
+        </p:spPr>
+      </p:pic>
+      <p:sp>
+        <p:nvSpPr>
+          <p:cNvPr id="22" name="TextBox 21">
+            <a:extLst>
+              <a:ext uri="{FF2B5EF4-FFF2-40B4-BE49-F238E27FC236}">
+                <a16:creationId xmlns:a16="http://schemas.microsoft.com/office/drawing/2014/main" id="{0E7AF935-C9DA-A1C8-F302-67A8ABEAB3C3}"/>
+              </a:ext>
+            </a:extLst>
+          </p:cNvPr>
+          <p:cNvSpPr txBox="1"/>
+          <p:nvPr/>
+        </p:nvSpPr>
+        <p:spPr>
+          <a:xfrm>
+            <a:off x="5077981" y="2512330"/>
+            <a:ext cx="2004850" cy="2492990"/>
+          </a:xfrm>
+          <a:prstGeom prst="rect">
+            <a:avLst/>
+          </a:prstGeom>
+          <a:noFill/>
+        </p:spPr>
+        <p:txBody>
+          <a:bodyPr wrap="square" rtlCol="0">
+            <a:spAutoFit/>
+          </a:bodyPr>
+          <a:lstStyle/>
+          <a:p>
+            <a:pPr algn="ctr"/>
+            <a:r>
+              <a:rPr lang="de-DE" sz="1600" b="1" dirty="0"/>
+              <a:t>Vorbereitung</a:t>
+            </a:r>
+          </a:p>
+          <a:p>
+            <a:pPr algn="ctr"/>
+            <a:endParaRPr lang="de-DE" sz="1400" dirty="0"/>
+          </a:p>
+          <a:p>
+            <a:pPr algn="ctr"/>
+            <a:r>
+              <a:rPr lang="de-DE" sz="1400" dirty="0"/>
+              <a:t>Bereinigung Fehlende Werte oder unvollständiger Daten</a:t>
+            </a:r>
+          </a:p>
+          <a:p>
+            <a:pPr algn="ctr"/>
+            <a:endParaRPr lang="de-DE" sz="1400" dirty="0"/>
+          </a:p>
+          <a:p>
+            <a:pPr algn="ctr"/>
+            <a:r>
+              <a:rPr lang="de-DE" sz="1400" dirty="0"/>
+              <a:t>Transformation und </a:t>
+            </a:r>
+            <a:r>
+              <a:rPr lang="de-DE" sz="1400" dirty="0" err="1"/>
+              <a:t>strukturierung</a:t>
+            </a:r>
+            <a:r>
+              <a:rPr lang="de-DE" sz="1400" dirty="0"/>
+              <a:t> der Rohdaten</a:t>
+            </a:r>
+          </a:p>
+          <a:p>
+            <a:pPr algn="ctr"/>
+            <a:endParaRPr lang="de-DE" sz="1400" dirty="0"/>
+          </a:p>
+          <a:p>
+            <a:pPr algn="ctr"/>
+            <a:r>
+              <a:rPr lang="de-DE" sz="1400" dirty="0" err="1"/>
+              <a:t>Z.b.</a:t>
+            </a:r>
+            <a:r>
+              <a:rPr lang="de-DE" sz="1400" dirty="0"/>
+              <a:t> EUR, USD</a:t>
+            </a:r>
+          </a:p>
+        </p:txBody>
+      </p:sp>
+      <p:sp>
+        <p:nvSpPr>
+          <p:cNvPr id="38" name="Rectangle: Rounded Corners 37">
+            <a:extLst>
+              <a:ext uri="{FF2B5EF4-FFF2-40B4-BE49-F238E27FC236}">
+                <a16:creationId xmlns:a16="http://schemas.microsoft.com/office/drawing/2014/main" id="{C98568F5-E42F-8BB3-A490-D5BE0EF78F44}"/>
+              </a:ext>
+            </a:extLst>
+          </p:cNvPr>
+          <p:cNvSpPr/>
+          <p:nvPr/>
+        </p:nvSpPr>
+        <p:spPr>
+          <a:xfrm>
+            <a:off x="7321972" y="1012371"/>
+            <a:ext cx="2067374" cy="4833257"/>
+          </a:xfrm>
+          <a:prstGeom prst="roundRect">
+            <a:avLst/>
+          </a:prstGeom>
+          <a:solidFill>
+            <a:srgbClr val="9999FF"/>
+          </a:solidFill>
+          <a:ln>
+            <a:noFill/>
+          </a:ln>
+        </p:spPr>
+        <p:style>
+          <a:lnRef idx="2">
+            <a:schemeClr val="accent1">
+              <a:shade val="15000"/>
+            </a:schemeClr>
+          </a:lnRef>
+          <a:fillRef idx="1">
+            <a:schemeClr val="accent1"/>
+          </a:fillRef>
+          <a:effectRef idx="0">
+            <a:schemeClr val="accent1"/>
+          </a:effectRef>
+          <a:fontRef idx="minor">
+            <a:schemeClr val="lt1"/>
+          </a:fontRef>
+        </p:style>
+        <p:txBody>
+          <a:bodyPr rtlCol="0" anchor="ctr"/>
+          <a:lstStyle/>
+          <a:p>
+            <a:pPr algn="ctr"/>
+            <a:endParaRPr lang="LID4096"/>
+          </a:p>
+        </p:txBody>
+      </p:sp>
+      <p:pic>
+        <p:nvPicPr>
+          <p:cNvPr id="13" name="Graphic 12" descr="Research">
+            <a:extLst>
+              <a:ext uri="{FF2B5EF4-FFF2-40B4-BE49-F238E27FC236}">
+                <a16:creationId xmlns:a16="http://schemas.microsoft.com/office/drawing/2014/main" id="{A19EC08F-EE9E-EEC3-70FF-6AA50E2E5122}"/>
+              </a:ext>
+            </a:extLst>
+          </p:cNvPr>
+          <p:cNvPicPr>
+            <a:picLocks noChangeAspect="1"/>
+          </p:cNvPicPr>
+          <p:nvPr/>
+        </p:nvPicPr>
+        <p:blipFill>
+          <a:blip r:embed="rId9">
+            <a:extLst>
+              <a:ext uri="{96DAC541-7B7A-43D3-8B79-37D633B846F1}">
+                <asvg:svgBlip xmlns:asvg="http://schemas.microsoft.com/office/drawing/2016/SVG/main" r:embed="rId10"/>
+              </a:ext>
+            </a:extLst>
+          </a:blip>
+          <a:stretch>
+            <a:fillRect/>
+          </a:stretch>
+        </p:blipFill>
+        <p:spPr>
+          <a:xfrm>
+            <a:off x="7898459" y="1455763"/>
+            <a:ext cx="914400" cy="914400"/>
+          </a:xfrm>
+          <a:prstGeom prst="rect">
+            <a:avLst/>
+          </a:prstGeom>
+        </p:spPr>
+      </p:pic>
+      <p:sp>
+        <p:nvSpPr>
+          <p:cNvPr id="23" name="TextBox 22">
+            <a:extLst>
+              <a:ext uri="{FF2B5EF4-FFF2-40B4-BE49-F238E27FC236}">
+                <a16:creationId xmlns:a16="http://schemas.microsoft.com/office/drawing/2014/main" id="{287E938B-C533-53F6-0B07-680FA385DE68}"/>
+              </a:ext>
+            </a:extLst>
+          </p:cNvPr>
+          <p:cNvSpPr txBox="1"/>
+          <p:nvPr/>
+        </p:nvSpPr>
+        <p:spPr>
+          <a:xfrm>
+            <a:off x="7353234" y="2512330"/>
+            <a:ext cx="2004850" cy="2492990"/>
+          </a:xfrm>
+          <a:prstGeom prst="rect">
+            <a:avLst/>
+          </a:prstGeom>
+          <a:noFill/>
+        </p:spPr>
+        <p:txBody>
+          <a:bodyPr wrap="square" rtlCol="0">
+            <a:spAutoFit/>
+          </a:bodyPr>
+          <a:lstStyle/>
+          <a:p>
+            <a:pPr algn="ctr"/>
+            <a:r>
+              <a:rPr lang="de-DE" sz="1600" b="1" dirty="0"/>
+              <a:t>Analyse</a:t>
+            </a:r>
+          </a:p>
+          <a:p>
+            <a:pPr algn="ctr"/>
+            <a:endParaRPr lang="de-DE" sz="1400" dirty="0"/>
+          </a:p>
+          <a:p>
+            <a:pPr algn="ctr"/>
+            <a:r>
+              <a:rPr lang="en-US" sz="1400" dirty="0" err="1"/>
+              <a:t>Statistische</a:t>
+            </a:r>
+            <a:r>
+              <a:rPr lang="en-US" sz="1400" dirty="0"/>
+              <a:t> </a:t>
+            </a:r>
+            <a:r>
+              <a:rPr lang="en-US" sz="1400" dirty="0" err="1"/>
+              <a:t>Auswertung</a:t>
+            </a:r>
+            <a:r>
+              <a:rPr lang="en-US" sz="1400" dirty="0"/>
+              <a:t> </a:t>
+            </a:r>
+          </a:p>
+          <a:p>
+            <a:pPr algn="ctr"/>
+            <a:endParaRPr lang="de-DE" sz="1400" dirty="0"/>
+          </a:p>
+          <a:p>
+            <a:pPr algn="ctr"/>
+            <a:r>
+              <a:rPr lang="de-DE" sz="1400" dirty="0"/>
+              <a:t>Korrelationen</a:t>
+            </a:r>
+          </a:p>
+          <a:p>
+            <a:pPr algn="ctr"/>
+            <a:endParaRPr lang="de-DE" sz="1400" dirty="0"/>
+          </a:p>
+          <a:p>
+            <a:pPr algn="ctr"/>
+            <a:r>
+              <a:rPr lang="de-DE" sz="1400" dirty="0"/>
+              <a:t>Mustererkennung</a:t>
+            </a:r>
+          </a:p>
+          <a:p>
+            <a:pPr algn="ctr"/>
+            <a:endParaRPr lang="de-DE" sz="1400" dirty="0"/>
+          </a:p>
+          <a:p>
+            <a:pPr algn="ctr"/>
+            <a:r>
+              <a:rPr lang="de-DE" sz="1400" dirty="0"/>
+              <a:t>Anwendung von Modellen zur</a:t>
+            </a:r>
+          </a:p>
+          <a:p>
+            <a:pPr algn="ctr"/>
+            <a:r>
+              <a:rPr lang="de-DE" sz="1400" dirty="0"/>
+              <a:t>Erkenntnisgewinnung</a:t>
+            </a:r>
+            <a:endParaRPr lang="LID4096" sz="1400" dirty="0"/>
+          </a:p>
+        </p:txBody>
+      </p:sp>
+      <p:sp>
+        <p:nvSpPr>
+          <p:cNvPr id="39" name="Rectangle: Rounded Corners 38">
+            <a:extLst>
+              <a:ext uri="{FF2B5EF4-FFF2-40B4-BE49-F238E27FC236}">
+                <a16:creationId xmlns:a16="http://schemas.microsoft.com/office/drawing/2014/main" id="{BC62606D-036F-F460-EAC8-BF67CF336768}"/>
+              </a:ext>
+            </a:extLst>
+          </p:cNvPr>
+          <p:cNvSpPr/>
+          <p:nvPr/>
+        </p:nvSpPr>
+        <p:spPr>
+          <a:xfrm>
+            <a:off x="9597223" y="1024616"/>
+            <a:ext cx="2067374" cy="4833257"/>
+          </a:xfrm>
+          <a:prstGeom prst="roundRect">
+            <a:avLst/>
+          </a:prstGeom>
+          <a:solidFill>
+            <a:schemeClr val="accent6">
+              <a:lumMod val="60000"/>
+              <a:lumOff val="40000"/>
+            </a:schemeClr>
+          </a:solidFill>
+          <a:ln>
+            <a:noFill/>
+          </a:ln>
+        </p:spPr>
+        <p:style>
+          <a:lnRef idx="2">
+            <a:schemeClr val="accent1">
+              <a:shade val="15000"/>
+            </a:schemeClr>
+          </a:lnRef>
+          <a:fillRef idx="1">
+            <a:schemeClr val="accent1"/>
+          </a:fillRef>
+          <a:effectRef idx="0">
+            <a:schemeClr val="accent1"/>
+          </a:effectRef>
+          <a:fontRef idx="minor">
+            <a:schemeClr val="lt1"/>
+          </a:fontRef>
+        </p:style>
+        <p:txBody>
+          <a:bodyPr rtlCol="0" anchor="ctr"/>
+          <a:lstStyle/>
+          <a:p>
+            <a:pPr algn="ctr"/>
+            <a:endParaRPr lang="LID4096"/>
+          </a:p>
+        </p:txBody>
+      </p:sp>
+      <p:pic>
+        <p:nvPicPr>
+          <p:cNvPr id="15" name="Graphic 14" descr="Share">
+            <a:extLst>
+              <a:ext uri="{FF2B5EF4-FFF2-40B4-BE49-F238E27FC236}">
+                <a16:creationId xmlns:a16="http://schemas.microsoft.com/office/drawing/2014/main" id="{FF895700-3132-0648-A450-8F1704B8964F}"/>
+              </a:ext>
+            </a:extLst>
+          </p:cNvPr>
+          <p:cNvPicPr>
+            <a:picLocks noChangeAspect="1"/>
+          </p:cNvPicPr>
+          <p:nvPr/>
+        </p:nvPicPr>
+        <p:blipFill>
+          <a:blip r:embed="rId11">
+            <a:extLst>
+              <a:ext uri="{96DAC541-7B7A-43D3-8B79-37D633B846F1}">
+                <asvg:svgBlip xmlns:asvg="http://schemas.microsoft.com/office/drawing/2016/SVG/main" r:embed="rId12"/>
+              </a:ext>
+            </a:extLst>
+          </a:blip>
+          <a:stretch>
+            <a:fillRect/>
+          </a:stretch>
+        </p:blipFill>
+        <p:spPr>
+          <a:xfrm>
+            <a:off x="10173710" y="1455763"/>
+            <a:ext cx="914400" cy="914400"/>
+          </a:xfrm>
+          <a:prstGeom prst="rect">
+            <a:avLst/>
+          </a:prstGeom>
+        </p:spPr>
+      </p:pic>
+      <p:sp>
+        <p:nvSpPr>
+          <p:cNvPr id="24" name="TextBox 23">
+            <a:extLst>
+              <a:ext uri="{FF2B5EF4-FFF2-40B4-BE49-F238E27FC236}">
+                <a16:creationId xmlns:a16="http://schemas.microsoft.com/office/drawing/2014/main" id="{E007D182-B808-E93F-8C23-74CEF8A12818}"/>
+              </a:ext>
+            </a:extLst>
+          </p:cNvPr>
+          <p:cNvSpPr txBox="1"/>
+          <p:nvPr/>
+        </p:nvSpPr>
+        <p:spPr>
+          <a:xfrm>
+            <a:off x="9628485" y="2512330"/>
+            <a:ext cx="2004850" cy="2277547"/>
+          </a:xfrm>
+          <a:prstGeom prst="rect">
+            <a:avLst/>
+          </a:prstGeom>
+          <a:noFill/>
+        </p:spPr>
+        <p:txBody>
+          <a:bodyPr wrap="square" rtlCol="0">
+            <a:spAutoFit/>
+          </a:bodyPr>
+          <a:lstStyle/>
+          <a:p>
+            <a:pPr algn="ctr"/>
+            <a:r>
+              <a:rPr lang="de-DE" sz="1600" b="1" dirty="0"/>
+              <a:t>Teilen</a:t>
+            </a:r>
+          </a:p>
+          <a:p>
+            <a:pPr algn="ctr"/>
+            <a:endParaRPr lang="de-DE" sz="1400" dirty="0"/>
+          </a:p>
+          <a:p>
+            <a:pPr algn="ctr"/>
+            <a:r>
+              <a:rPr lang="de-DE" sz="1400" dirty="0"/>
+              <a:t>Berichte</a:t>
+            </a:r>
+          </a:p>
+          <a:p>
+            <a:pPr algn="ctr"/>
+            <a:endParaRPr lang="de-DE" sz="1400" dirty="0"/>
+          </a:p>
+          <a:p>
+            <a:pPr algn="ctr"/>
+            <a:r>
+              <a:rPr lang="de-DE" sz="1400" dirty="0"/>
+              <a:t>Präsentationen</a:t>
+            </a:r>
+          </a:p>
+          <a:p>
+            <a:pPr algn="ctr"/>
+            <a:endParaRPr lang="de-DE" sz="1400" dirty="0"/>
+          </a:p>
+          <a:p>
+            <a:pPr algn="ctr"/>
+            <a:r>
+              <a:rPr lang="en-US" sz="1400" dirty="0"/>
+              <a:t>Storytelling </a:t>
+            </a:r>
+            <a:r>
+              <a:rPr lang="en-US" sz="1400" dirty="0" err="1"/>
+              <a:t>mit</a:t>
+            </a:r>
+            <a:r>
+              <a:rPr lang="en-US" sz="1400" dirty="0"/>
+              <a:t> Daten</a:t>
+            </a:r>
+          </a:p>
+          <a:p>
+            <a:pPr algn="ctr"/>
+            <a:endParaRPr lang="en-US" sz="1400" dirty="0"/>
+          </a:p>
+          <a:p>
+            <a:pPr algn="ctr"/>
+            <a:r>
+              <a:rPr lang="en-US" sz="1400" dirty="0"/>
+              <a:t>Klare </a:t>
+            </a:r>
+            <a:r>
+              <a:rPr lang="en-US" sz="1400" dirty="0" err="1"/>
+              <a:t>Empfehlungen</a:t>
+            </a:r>
+            <a:r>
+              <a:rPr lang="en-US" sz="1400" dirty="0"/>
+              <a:t> </a:t>
+            </a:r>
+            <a:r>
+              <a:rPr lang="en-US" sz="1400" dirty="0" err="1"/>
+              <a:t>geben</a:t>
+            </a:r>
+            <a:endParaRPr lang="LID4096" sz="1400" dirty="0"/>
           </a:p>
         </p:txBody>
       </p:sp>
     </p:spTree>
     <p:extLst>
       <p:ext uri="{BB962C8B-B14F-4D97-AF65-F5344CB8AC3E}">
-        <p14:creationId xmlns:p14="http://schemas.microsoft.com/office/powerpoint/2010/main" val="3083913356"/>
+        <p14:creationId xmlns:p14="http://schemas.microsoft.com/office/powerpoint/2010/main" val="2387338393"/>
       </p:ext>
     </p:extLst>
   </p:cSld>
@@ -3672,6 +5399,2579 @@
       </p:grpSpPr>
       <p:sp>
         <p:nvSpPr>
+          <p:cNvPr id="18" name="TextBox 17">
+            <a:extLst>
+              <a:ext uri="{FF2B5EF4-FFF2-40B4-BE49-F238E27FC236}">
+                <a16:creationId xmlns:a16="http://schemas.microsoft.com/office/drawing/2014/main" id="{524F6DF1-AF8B-B5EC-EC2F-2A121854376C}"/>
+              </a:ext>
+            </a:extLst>
+          </p:cNvPr>
+          <p:cNvSpPr txBox="1"/>
+          <p:nvPr/>
+        </p:nvSpPr>
+        <p:spPr>
+          <a:xfrm>
+            <a:off x="358375" y="1490503"/>
+            <a:ext cx="6096680" cy="4185761"/>
+          </a:xfrm>
+          <a:prstGeom prst="rect">
+            <a:avLst/>
+          </a:prstGeom>
+          <a:noFill/>
+        </p:spPr>
+        <p:txBody>
+          <a:bodyPr wrap="square">
+            <a:spAutoFit/>
+          </a:bodyPr>
+          <a:lstStyle/>
+          <a:p>
+            <a:pPr>
+              <a:buNone/>
+            </a:pPr>
+            <a:r>
+              <a:rPr lang="de-DE" sz="1400" b="1" dirty="0">
+                <a:solidFill>
+                  <a:schemeClr val="accent5">
+                    <a:lumMod val="75000"/>
+                  </a:schemeClr>
+                </a:solidFill>
+              </a:rPr>
+              <a:t>Setup, Daten &amp; Datentypen</a:t>
+            </a:r>
+            <a:endParaRPr lang="de-DE" sz="1400" dirty="0">
+              <a:solidFill>
+                <a:schemeClr val="accent5">
+                  <a:lumMod val="75000"/>
+                </a:schemeClr>
+              </a:solidFill>
+            </a:endParaRPr>
+          </a:p>
+          <a:p>
+            <a:pPr marL="285750" indent="-285750">
+              <a:buFont typeface="Arial" panose="020B0604020202020204" pitchFamily="34" charset="0"/>
+              <a:buChar char="•"/>
+            </a:pPr>
+            <a:r>
+              <a:rPr lang="de-DE" sz="1400" dirty="0"/>
+              <a:t>Python, </a:t>
+            </a:r>
+            <a:r>
+              <a:rPr lang="de-DE" sz="1400" dirty="0" err="1"/>
+              <a:t>Jupzter</a:t>
+            </a:r>
+            <a:r>
+              <a:rPr lang="de-DE" sz="1400" dirty="0"/>
+              <a:t> Notebook, Bibliotheken installieren, </a:t>
+            </a:r>
+            <a:r>
+              <a:rPr lang="de-DE" sz="1400" dirty="0" err="1"/>
+              <a:t>VSCode</a:t>
+            </a:r>
+            <a:endParaRPr lang="de-DE" sz="1400" dirty="0"/>
+          </a:p>
+          <a:p>
+            <a:pPr marL="285750" indent="-285750">
+              <a:buFont typeface="Arial" panose="020B0604020202020204" pitchFamily="34" charset="0"/>
+              <a:buChar char="•"/>
+            </a:pPr>
+            <a:r>
+              <a:rPr lang="de-DE" sz="1400" dirty="0"/>
+              <a:t>Überblick über Datentypen</a:t>
+            </a:r>
+          </a:p>
+          <a:p>
+            <a:pPr marL="285750" indent="-285750">
+              <a:buFont typeface="Arial" panose="020B0604020202020204" pitchFamily="34" charset="0"/>
+              <a:buChar char="•"/>
+            </a:pPr>
+            <a:r>
+              <a:rPr lang="de-DE" sz="1400" dirty="0"/>
+              <a:t>Data | Information</a:t>
+            </a:r>
+          </a:p>
+          <a:p>
+            <a:pPr>
+              <a:buFont typeface="Arial" panose="020B0604020202020204" pitchFamily="34" charset="0"/>
+              <a:buChar char="•"/>
+            </a:pPr>
+            <a:endParaRPr lang="de-DE" sz="1400" dirty="0"/>
+          </a:p>
+          <a:p>
+            <a:pPr>
+              <a:buNone/>
+            </a:pPr>
+            <a:r>
+              <a:rPr lang="de-DE" sz="1400" b="1" dirty="0">
+                <a:solidFill>
+                  <a:schemeClr val="accent5">
+                    <a:lumMod val="75000"/>
+                  </a:schemeClr>
+                </a:solidFill>
+              </a:rPr>
+              <a:t>Analyseziele &amp; KPIs definieren</a:t>
+            </a:r>
+            <a:endParaRPr lang="de-DE" sz="1400" dirty="0">
+              <a:solidFill>
+                <a:schemeClr val="accent5">
+                  <a:lumMod val="75000"/>
+                </a:schemeClr>
+              </a:solidFill>
+            </a:endParaRPr>
+          </a:p>
+          <a:p>
+            <a:pPr marL="285750" indent="-285750">
+              <a:buFont typeface="Arial" panose="020B0604020202020204" pitchFamily="34" charset="0"/>
+              <a:buChar char="•"/>
+            </a:pPr>
+            <a:r>
+              <a:rPr lang="de-DE" sz="1400" dirty="0"/>
+              <a:t>Analysefragen &amp; Ziele identifizieren</a:t>
+            </a:r>
+          </a:p>
+          <a:p>
+            <a:pPr marL="285750" indent="-285750">
+              <a:buFont typeface="Arial" panose="020B0604020202020204" pitchFamily="34" charset="0"/>
+              <a:buChar char="•"/>
+            </a:pPr>
+            <a:r>
+              <a:rPr lang="de-DE" sz="1400" dirty="0"/>
+              <a:t>KPIs mit Geschäftsentscheidungen verknüpfen</a:t>
+            </a:r>
+          </a:p>
+          <a:p>
+            <a:pPr>
+              <a:buFont typeface="Arial" panose="020B0604020202020204" pitchFamily="34" charset="0"/>
+              <a:buChar char="•"/>
+            </a:pPr>
+            <a:endParaRPr lang="de-DE" sz="1400" dirty="0"/>
+          </a:p>
+          <a:p>
+            <a:pPr>
+              <a:buNone/>
+            </a:pPr>
+            <a:r>
+              <a:rPr lang="de-DE" sz="1400" b="1" dirty="0">
+                <a:solidFill>
+                  <a:schemeClr val="accent5">
+                    <a:lumMod val="75000"/>
+                  </a:schemeClr>
+                </a:solidFill>
+              </a:rPr>
+              <a:t>Datenerhebung &amp; Datenqualität</a:t>
+            </a:r>
+            <a:endParaRPr lang="de-DE" sz="1400" dirty="0">
+              <a:solidFill>
+                <a:schemeClr val="accent5">
+                  <a:lumMod val="75000"/>
+                </a:schemeClr>
+              </a:solidFill>
+            </a:endParaRPr>
+          </a:p>
+          <a:p>
+            <a:pPr marL="285750" indent="-285750">
+              <a:buFont typeface="Arial" panose="020B0604020202020204" pitchFamily="34" charset="0"/>
+              <a:buChar char="•"/>
+            </a:pPr>
+            <a:r>
+              <a:rPr lang="de-DE" sz="1400" dirty="0"/>
+              <a:t>Daten sammeln: APIs, lokale Dateien, unstrukturierte Daten</a:t>
+            </a:r>
+          </a:p>
+          <a:p>
+            <a:pPr marL="285750" indent="-285750">
+              <a:buFont typeface="Arial" panose="020B0604020202020204" pitchFamily="34" charset="0"/>
+              <a:buChar char="•"/>
+            </a:pPr>
+            <a:r>
+              <a:rPr lang="de-DE" sz="1400" dirty="0"/>
+              <a:t>Vollständigkeit, Genauigkeit, Konsistenz prüfen</a:t>
+            </a:r>
+          </a:p>
+          <a:p>
+            <a:pPr marL="285750" indent="-285750">
+              <a:buFont typeface="Arial" panose="020B0604020202020204" pitchFamily="34" charset="0"/>
+              <a:buChar char="•"/>
+            </a:pPr>
+            <a:r>
+              <a:rPr lang="de-DE" sz="1400" dirty="0"/>
+              <a:t>Daten laden &amp; inspizieren</a:t>
+            </a:r>
+          </a:p>
+          <a:p>
+            <a:pPr marL="285750" indent="-285750">
+              <a:buFont typeface="Arial" panose="020B0604020202020204" pitchFamily="34" charset="0"/>
+              <a:buChar char="•"/>
+            </a:pPr>
+            <a:r>
+              <a:rPr lang="de-DE" sz="1400" dirty="0"/>
+              <a:t>Fehlende Werte, Duplikate, Format prüfen</a:t>
+            </a:r>
+          </a:p>
+          <a:p>
+            <a:pPr marL="285750" indent="-285750">
+              <a:buFont typeface="Arial" panose="020B0604020202020204" pitchFamily="34" charset="0"/>
+              <a:buChar char="•"/>
+            </a:pPr>
+            <a:endParaRPr lang="de-DE" sz="1400" dirty="0"/>
+          </a:p>
+          <a:p>
+            <a:pPr>
+              <a:buNone/>
+            </a:pPr>
+            <a:r>
+              <a:rPr lang="de-DE" sz="1400" b="1" dirty="0">
+                <a:solidFill>
+                  <a:schemeClr val="accent5">
+                    <a:lumMod val="75000"/>
+                  </a:schemeClr>
+                </a:solidFill>
+              </a:rPr>
+              <a:t>Datenbereinigung &amp; -vorbereitung</a:t>
+            </a:r>
+            <a:endParaRPr lang="de-DE" sz="1400" dirty="0">
+              <a:solidFill>
+                <a:schemeClr val="accent5">
+                  <a:lumMod val="75000"/>
+                </a:schemeClr>
+              </a:solidFill>
+            </a:endParaRPr>
+          </a:p>
+          <a:p>
+            <a:pPr marL="285750" indent="-285750">
+              <a:buFont typeface="Arial" panose="020B0604020202020204" pitchFamily="34" charset="0"/>
+              <a:buChar char="•"/>
+            </a:pPr>
+            <a:r>
+              <a:rPr lang="de-DE" sz="1400" dirty="0"/>
+              <a:t>Fehlende/falsche Werte korrigieren</a:t>
+            </a:r>
+          </a:p>
+          <a:p>
+            <a:pPr marL="285750" indent="-285750">
+              <a:buFont typeface="Arial" panose="020B0604020202020204" pitchFamily="34" charset="0"/>
+              <a:buChar char="•"/>
+            </a:pPr>
+            <a:r>
+              <a:rPr lang="de-DE" sz="1400" dirty="0"/>
+              <a:t>Formate standardisieren</a:t>
+            </a:r>
+          </a:p>
+          <a:p>
+            <a:pPr marL="285750" indent="-285750">
+              <a:buFont typeface="Arial" panose="020B0604020202020204" pitchFamily="34" charset="0"/>
+              <a:buChar char="•"/>
+            </a:pPr>
+            <a:r>
+              <a:rPr lang="de-DE" sz="1400" dirty="0"/>
+              <a:t>Variablen für Analyse transformieren</a:t>
+            </a:r>
+          </a:p>
+        </p:txBody>
+      </p:sp>
+      <p:sp>
+        <p:nvSpPr>
+          <p:cNvPr id="20" name="TextBox 19">
+            <a:extLst>
+              <a:ext uri="{FF2B5EF4-FFF2-40B4-BE49-F238E27FC236}">
+                <a16:creationId xmlns:a16="http://schemas.microsoft.com/office/drawing/2014/main" id="{88DBAAF1-C0D6-B182-1588-C698583090A2}"/>
+              </a:ext>
+            </a:extLst>
+          </p:cNvPr>
+          <p:cNvSpPr txBox="1"/>
+          <p:nvPr/>
+        </p:nvSpPr>
+        <p:spPr>
+          <a:xfrm>
+            <a:off x="5950910" y="1490503"/>
+            <a:ext cx="6096680" cy="4616648"/>
+          </a:xfrm>
+          <a:prstGeom prst="rect">
+            <a:avLst/>
+          </a:prstGeom>
+          <a:noFill/>
+        </p:spPr>
+        <p:txBody>
+          <a:bodyPr wrap="square">
+            <a:spAutoFit/>
+          </a:bodyPr>
+          <a:lstStyle/>
+          <a:p>
+            <a:pPr>
+              <a:buNone/>
+            </a:pPr>
+            <a:r>
+              <a:rPr lang="en-US" sz="1400" b="1" dirty="0" err="1">
+                <a:solidFill>
+                  <a:schemeClr val="accent5">
+                    <a:lumMod val="75000"/>
+                  </a:schemeClr>
+                </a:solidFill>
+              </a:rPr>
+              <a:t>Datenmodellierung</a:t>
+            </a:r>
+            <a:r>
+              <a:rPr lang="en-US" sz="1400" b="1" dirty="0">
+                <a:solidFill>
+                  <a:schemeClr val="accent5">
+                    <a:lumMod val="75000"/>
+                  </a:schemeClr>
+                </a:solidFill>
+              </a:rPr>
+              <a:t> &amp; Aggregation</a:t>
+            </a:r>
+            <a:endParaRPr lang="en-US" sz="1400" dirty="0">
+              <a:solidFill>
+                <a:schemeClr val="accent5">
+                  <a:lumMod val="75000"/>
+                </a:schemeClr>
+              </a:solidFill>
+            </a:endParaRPr>
+          </a:p>
+          <a:p>
+            <a:pPr marL="285750" indent="-285750">
+              <a:buFont typeface="Arial" panose="020B0604020202020204" pitchFamily="34" charset="0"/>
+              <a:buChar char="•"/>
+            </a:pPr>
+            <a:r>
+              <a:rPr lang="en-US" sz="1400" dirty="0"/>
+              <a:t>Daten in </a:t>
+            </a:r>
+            <a:r>
+              <a:rPr lang="en-US" sz="1400" dirty="0" err="1"/>
+              <a:t>Tabellen</a:t>
+            </a:r>
+            <a:r>
+              <a:rPr lang="en-US" sz="1400" dirty="0"/>
+              <a:t> &amp; </a:t>
+            </a:r>
+            <a:r>
+              <a:rPr lang="en-US" sz="1400" dirty="0" err="1"/>
+              <a:t>Beziehungen</a:t>
+            </a:r>
+            <a:r>
+              <a:rPr lang="en-US" sz="1400" dirty="0"/>
+              <a:t> </a:t>
+            </a:r>
+            <a:r>
+              <a:rPr lang="en-US" sz="1400" dirty="0" err="1"/>
+              <a:t>organisieren</a:t>
+            </a:r>
+            <a:endParaRPr lang="en-US" sz="1400" dirty="0"/>
+          </a:p>
+          <a:p>
+            <a:pPr marL="285750" indent="-285750">
+              <a:buFont typeface="Arial" panose="020B0604020202020204" pitchFamily="34" charset="0"/>
+              <a:buChar char="•"/>
+            </a:pPr>
+            <a:r>
+              <a:rPr lang="en-US" sz="1400" dirty="0"/>
+              <a:t>Feature Engineering &amp; </a:t>
+            </a:r>
+            <a:r>
+              <a:rPr lang="en-US" sz="1400" dirty="0" err="1"/>
+              <a:t>Aggregationen</a:t>
+            </a:r>
+            <a:r>
+              <a:rPr lang="en-US" sz="1400" dirty="0"/>
+              <a:t> </a:t>
+            </a:r>
+          </a:p>
+          <a:p>
+            <a:pPr>
+              <a:buFont typeface="Arial" panose="020B0604020202020204" pitchFamily="34" charset="0"/>
+              <a:buChar char="•"/>
+            </a:pPr>
+            <a:endParaRPr lang="en-US" sz="1400" dirty="0"/>
+          </a:p>
+          <a:p>
+            <a:r>
+              <a:rPr lang="en-US" sz="1400" b="1" dirty="0" err="1">
+                <a:solidFill>
+                  <a:schemeClr val="accent5">
+                    <a:lumMod val="75000"/>
+                  </a:schemeClr>
+                </a:solidFill>
+              </a:rPr>
+              <a:t>Deskriptive</a:t>
+            </a:r>
+            <a:r>
+              <a:rPr lang="en-US" sz="1400" b="1" dirty="0">
+                <a:solidFill>
+                  <a:schemeClr val="accent5">
+                    <a:lumMod val="75000"/>
+                  </a:schemeClr>
+                </a:solidFill>
+              </a:rPr>
+              <a:t> </a:t>
+            </a:r>
+            <a:r>
+              <a:rPr lang="en-US" sz="1400" b="1" dirty="0" err="1">
+                <a:solidFill>
+                  <a:schemeClr val="accent5">
+                    <a:lumMod val="75000"/>
+                  </a:schemeClr>
+                </a:solidFill>
+              </a:rPr>
+              <a:t>Statistik</a:t>
+            </a:r>
+            <a:r>
+              <a:rPr lang="en-US" sz="1400" b="1" dirty="0">
+                <a:solidFill>
+                  <a:schemeClr val="accent5">
+                    <a:lumMod val="75000"/>
+                  </a:schemeClr>
+                </a:solidFill>
+              </a:rPr>
+              <a:t> &amp; KPIs</a:t>
+            </a:r>
+            <a:endParaRPr lang="en-US" sz="1400" dirty="0">
+              <a:solidFill>
+                <a:schemeClr val="accent5">
+                  <a:lumMod val="75000"/>
+                </a:schemeClr>
+              </a:solidFill>
+            </a:endParaRPr>
+          </a:p>
+          <a:p>
+            <a:r>
+              <a:rPr lang="en-US" sz="1400" dirty="0" err="1"/>
+              <a:t>Mittelwert</a:t>
+            </a:r>
+            <a:r>
+              <a:rPr lang="en-US" sz="1400" dirty="0"/>
+              <a:t>, Median, Modus, </a:t>
+            </a:r>
+            <a:r>
+              <a:rPr lang="en-US" sz="1400" dirty="0" err="1"/>
+              <a:t>Standardabweichung</a:t>
+            </a:r>
+            <a:r>
+              <a:rPr lang="en-US" sz="1400" dirty="0"/>
+              <a:t>, </a:t>
+            </a:r>
+            <a:r>
+              <a:rPr lang="en-US" sz="1400" dirty="0" err="1"/>
+              <a:t>Spannweite</a:t>
+            </a:r>
+            <a:endParaRPr lang="en-US" sz="1400" dirty="0"/>
+          </a:p>
+          <a:p>
+            <a:r>
+              <a:rPr lang="en-US" sz="1400" dirty="0" err="1"/>
+              <a:t>Korrelationen</a:t>
+            </a:r>
+            <a:r>
+              <a:rPr lang="en-US" sz="1400" dirty="0"/>
+              <a:t> &amp; </a:t>
+            </a:r>
+            <a:r>
+              <a:rPr lang="en-US" sz="1400" dirty="0" err="1"/>
+              <a:t>Kreuztabellen</a:t>
+            </a:r>
+            <a:endParaRPr lang="en-US" sz="1400" dirty="0"/>
+          </a:p>
+          <a:p>
+            <a:endParaRPr lang="en-US" sz="1400" dirty="0"/>
+          </a:p>
+          <a:p>
+            <a:pPr>
+              <a:buNone/>
+            </a:pPr>
+            <a:r>
+              <a:rPr lang="en-US" sz="1400" b="1" dirty="0" err="1">
+                <a:solidFill>
+                  <a:schemeClr val="accent5">
+                    <a:lumMod val="75000"/>
+                  </a:schemeClr>
+                </a:solidFill>
+              </a:rPr>
+              <a:t>Datenvisualisierung</a:t>
+            </a:r>
+            <a:endParaRPr lang="en-US" sz="1400" dirty="0">
+              <a:solidFill>
+                <a:schemeClr val="accent5">
+                  <a:lumMod val="75000"/>
+                </a:schemeClr>
+              </a:solidFill>
+            </a:endParaRPr>
+          </a:p>
+          <a:p>
+            <a:pPr marL="285750" indent="-285750">
+              <a:buFont typeface="Arial" panose="020B0604020202020204" pitchFamily="34" charset="0"/>
+              <a:buChar char="•"/>
+            </a:pPr>
+            <a:r>
+              <a:rPr lang="en-US" sz="1400" dirty="0" err="1"/>
+              <a:t>Klassische</a:t>
+            </a:r>
+            <a:r>
+              <a:rPr lang="en-US" sz="1400" dirty="0"/>
+              <a:t> </a:t>
+            </a:r>
+            <a:r>
+              <a:rPr lang="en-US" sz="1400" dirty="0" err="1"/>
+              <a:t>Diagramme</a:t>
+            </a:r>
+            <a:r>
+              <a:rPr lang="en-US" sz="1400" dirty="0"/>
+              <a:t>; </a:t>
+            </a:r>
+            <a:r>
+              <a:rPr lang="en-US" sz="1400" dirty="0" err="1"/>
+              <a:t>Balkendiagramm</a:t>
+            </a:r>
+            <a:r>
+              <a:rPr lang="en-US" sz="1400" dirty="0"/>
+              <a:t>, </a:t>
+            </a:r>
+            <a:r>
+              <a:rPr lang="en-US" sz="1400" dirty="0" err="1"/>
+              <a:t>Histogramm</a:t>
+            </a:r>
+            <a:r>
+              <a:rPr lang="en-US" sz="1400" dirty="0"/>
+              <a:t>, Boxplot, </a:t>
+            </a:r>
+            <a:r>
+              <a:rPr lang="en-US" sz="1400" dirty="0" err="1"/>
+              <a:t>Liniendiagramm</a:t>
+            </a:r>
+            <a:r>
+              <a:rPr lang="en-US" sz="1400" dirty="0"/>
+              <a:t>, </a:t>
+            </a:r>
+            <a:r>
+              <a:rPr lang="en-US" sz="1400" dirty="0" err="1"/>
+              <a:t>Streudiagramm</a:t>
+            </a:r>
+            <a:endParaRPr lang="en-US" sz="1400" dirty="0"/>
+          </a:p>
+          <a:p>
+            <a:pPr marL="285750" indent="-285750">
+              <a:buFont typeface="Arial" panose="020B0604020202020204" pitchFamily="34" charset="0"/>
+              <a:buChar char="•"/>
+            </a:pPr>
+            <a:r>
+              <a:rPr lang="en-US" sz="1400" dirty="0" err="1"/>
+              <a:t>Interaktive</a:t>
+            </a:r>
+            <a:r>
+              <a:rPr lang="en-US" sz="1400" dirty="0"/>
+              <a:t> Charts</a:t>
+            </a:r>
+          </a:p>
+          <a:p>
+            <a:pPr>
+              <a:buFont typeface="Arial" panose="020B0604020202020204" pitchFamily="34" charset="0"/>
+              <a:buChar char="•"/>
+            </a:pPr>
+            <a:endParaRPr lang="en-US" sz="1400" dirty="0"/>
+          </a:p>
+          <a:p>
+            <a:pPr>
+              <a:buNone/>
+            </a:pPr>
+            <a:r>
+              <a:rPr lang="en-US" sz="1400" b="1" dirty="0">
+                <a:solidFill>
+                  <a:schemeClr val="accent5">
+                    <a:lumMod val="75000"/>
+                  </a:schemeClr>
+                </a:solidFill>
+              </a:rPr>
+              <a:t>Analytics-Workflow &amp; Integration</a:t>
+            </a:r>
+            <a:endParaRPr lang="en-US" sz="1400" dirty="0">
+              <a:solidFill>
+                <a:schemeClr val="accent5">
+                  <a:lumMod val="75000"/>
+                </a:schemeClr>
+              </a:solidFill>
+            </a:endParaRPr>
+          </a:p>
+          <a:p>
+            <a:pPr marL="285750" indent="-285750">
+              <a:buFont typeface="Arial" panose="020B0604020202020204" pitchFamily="34" charset="0"/>
+              <a:buChar char="•"/>
+            </a:pPr>
+            <a:r>
+              <a:rPr lang="en-US" sz="1400" dirty="0"/>
+              <a:t>Strukturierter Workflow</a:t>
+            </a:r>
+          </a:p>
+          <a:p>
+            <a:pPr marL="285750" indent="-285750">
+              <a:buFont typeface="Arial" panose="020B0604020202020204" pitchFamily="34" charset="0"/>
+              <a:buChar char="•"/>
+            </a:pPr>
+            <a:r>
+              <a:rPr lang="en-US" sz="1400" dirty="0"/>
+              <a:t>Mini-</a:t>
+            </a:r>
+            <a:r>
+              <a:rPr lang="en-US" sz="1400" dirty="0" err="1"/>
+              <a:t>Fallbeispiele</a:t>
+            </a:r>
+            <a:r>
+              <a:rPr lang="en-US" sz="1400" dirty="0"/>
+              <a:t> </a:t>
+            </a:r>
+            <a:r>
+              <a:rPr lang="en-US" sz="1400" dirty="0" err="1"/>
+              <a:t>mit</a:t>
+            </a:r>
+            <a:r>
+              <a:rPr lang="en-US" sz="1400" dirty="0"/>
+              <a:t> </a:t>
+            </a:r>
+            <a:r>
+              <a:rPr lang="en-US" sz="1400" dirty="0" err="1"/>
+              <a:t>allen</a:t>
+            </a:r>
+            <a:r>
+              <a:rPr lang="en-US" sz="1400" dirty="0"/>
+              <a:t> </a:t>
+            </a:r>
+            <a:r>
+              <a:rPr lang="en-US" sz="1400" dirty="0" err="1"/>
+              <a:t>vorherigen</a:t>
+            </a:r>
+            <a:r>
+              <a:rPr lang="en-US" sz="1400" dirty="0"/>
+              <a:t> </a:t>
+            </a:r>
+            <a:r>
+              <a:rPr lang="en-US" sz="1400" dirty="0" err="1"/>
+              <a:t>Schritten</a:t>
+            </a:r>
+            <a:endParaRPr lang="en-US" sz="1400" dirty="0"/>
+          </a:p>
+          <a:p>
+            <a:endParaRPr lang="en-US" sz="1400" dirty="0"/>
+          </a:p>
+          <a:p>
+            <a:pPr>
+              <a:buNone/>
+            </a:pPr>
+            <a:r>
+              <a:rPr lang="en-US" sz="1400" b="1" dirty="0">
+                <a:solidFill>
+                  <a:schemeClr val="accent5">
+                    <a:lumMod val="75000"/>
+                  </a:schemeClr>
+                </a:solidFill>
+              </a:rPr>
+              <a:t>Capstone End-to-End Projekt</a:t>
+            </a:r>
+          </a:p>
+          <a:p>
+            <a:pPr marL="285750" indent="-285750">
+              <a:buFont typeface="Arial" panose="020B0604020202020204" pitchFamily="34" charset="0"/>
+              <a:buChar char="•"/>
+            </a:pPr>
+            <a:r>
+              <a:rPr lang="de-DE" sz="1400" dirty="0"/>
+              <a:t>Vollständige Analyse von der Fragestellung bis zur Präsentation</a:t>
+            </a:r>
+          </a:p>
+          <a:p>
+            <a:pPr marL="285750" indent="-285750">
+              <a:buFont typeface="Arial" panose="020B0604020202020204" pitchFamily="34" charset="0"/>
+              <a:buChar char="•"/>
+            </a:pPr>
+            <a:r>
+              <a:rPr lang="de-DE" sz="1400" dirty="0"/>
+              <a:t>Alle erlernten Schritte anwenden</a:t>
+            </a:r>
+          </a:p>
+          <a:p>
+            <a:pPr marL="285750" indent="-285750">
+              <a:buFont typeface="Arial" panose="020B0604020202020204" pitchFamily="34" charset="0"/>
+              <a:buChar char="•"/>
+            </a:pPr>
+            <a:r>
+              <a:rPr lang="de-DE" sz="1400" dirty="0"/>
+              <a:t>Ergebnisse präsentieren &amp; diskutieren</a:t>
+            </a:r>
+            <a:endParaRPr lang="en-US" sz="1400" dirty="0">
+              <a:solidFill>
+                <a:schemeClr val="accent5">
+                  <a:lumMod val="75000"/>
+                </a:schemeClr>
+              </a:solidFill>
+            </a:endParaRPr>
+          </a:p>
+        </p:txBody>
+      </p:sp>
+      <p:sp>
+        <p:nvSpPr>
+          <p:cNvPr id="22" name="TextBox 21">
+            <a:extLst>
+              <a:ext uri="{FF2B5EF4-FFF2-40B4-BE49-F238E27FC236}">
+                <a16:creationId xmlns:a16="http://schemas.microsoft.com/office/drawing/2014/main" id="{B45A6950-109D-6924-5D77-32AA072B8DCF}"/>
+              </a:ext>
+            </a:extLst>
+          </p:cNvPr>
+          <p:cNvSpPr txBox="1"/>
+          <p:nvPr/>
+        </p:nvSpPr>
+        <p:spPr>
+          <a:xfrm>
+            <a:off x="2493169" y="272534"/>
+            <a:ext cx="6920462" cy="523220"/>
+          </a:xfrm>
+          <a:prstGeom prst="rect">
+            <a:avLst/>
+          </a:prstGeom>
+          <a:noFill/>
+        </p:spPr>
+        <p:txBody>
+          <a:bodyPr wrap="square">
+            <a:spAutoFit/>
+          </a:bodyPr>
+          <a:lstStyle/>
+          <a:p>
+            <a:r>
+              <a:rPr lang="en-US" sz="2800" b="1" dirty="0" err="1"/>
+              <a:t>Methodische</a:t>
+            </a:r>
+            <a:r>
+              <a:rPr lang="en-US" sz="2800" b="1" dirty="0"/>
+              <a:t> </a:t>
+            </a:r>
+            <a:r>
+              <a:rPr lang="en-US" sz="2800" b="1" dirty="0" err="1"/>
+              <a:t>Grundlagen</a:t>
+            </a:r>
+            <a:r>
+              <a:rPr lang="en-US" sz="2800" b="1" dirty="0"/>
+              <a:t> der </a:t>
+            </a:r>
+            <a:r>
+              <a:rPr lang="en-US" sz="2800" b="1" dirty="0" err="1"/>
+              <a:t>Datenanalyse</a:t>
+            </a:r>
+            <a:endParaRPr lang="LID4096" sz="2800" dirty="0"/>
+          </a:p>
+        </p:txBody>
+      </p:sp>
+    </p:spTree>
+    <p:extLst>
+      <p:ext uri="{BB962C8B-B14F-4D97-AF65-F5344CB8AC3E}">
+        <p14:creationId xmlns:p14="http://schemas.microsoft.com/office/powerpoint/2010/main" val="294054981"/>
+      </p:ext>
+    </p:extLst>
+  </p:cSld>
+  <p:clrMapOvr>
+    <a:masterClrMapping/>
+  </p:clrMapOvr>
+  <p:timing>
+    <p:tnLst>
+      <p:par>
+        <p:cTn id="1" dur="indefinite" restart="never" nodeType="tmRoot">
+          <p:childTnLst>
+            <p:seq concurrent="1" nextAc="seek">
+              <p:cTn id="2" dur="indefinite" nodeType="mainSeq">
+                <p:childTnLst>
+                  <p:par>
+                    <p:cTn id="3" fill="hold">
+                      <p:stCondLst>
+                        <p:cond delay="indefinite"/>
+                      </p:stCondLst>
+                      <p:childTnLst>
+                        <p:par>
+                          <p:cTn id="4" fill="hold">
+                            <p:stCondLst>
+                              <p:cond delay="0"/>
+                            </p:stCondLst>
+                            <p:childTnLst>
+                              <p:par>
+                                <p:cTn id="5" presetID="10" presetClass="entr" presetSubtype="0" fill="hold" grpId="0" nodeType="clickEffect">
+                                  <p:stCondLst>
+                                    <p:cond delay="0"/>
+                                  </p:stCondLst>
+                                  <p:childTnLst>
+                                    <p:set>
+                                      <p:cBhvr>
+                                        <p:cTn id="6" dur="1" fill="hold">
+                                          <p:stCondLst>
+                                            <p:cond delay="0"/>
+                                          </p:stCondLst>
+                                        </p:cTn>
+                                        <p:tgtEl>
+                                          <p:spTgt spid="18">
+                                            <p:txEl>
+                                              <p:pRg st="0" end="0"/>
+                                            </p:txEl>
+                                          </p:spTgt>
+                                        </p:tgtEl>
+                                        <p:attrNameLst>
+                                          <p:attrName>style.visibility</p:attrName>
+                                        </p:attrNameLst>
+                                      </p:cBhvr>
+                                      <p:to>
+                                        <p:strVal val="visible"/>
+                                      </p:to>
+                                    </p:set>
+                                    <p:animEffect transition="in" filter="fade">
+                                      <p:cBhvr>
+                                        <p:cTn id="7" dur="500"/>
+                                        <p:tgtEl>
+                                          <p:spTgt spid="18">
+                                            <p:txEl>
+                                              <p:pRg st="0" end="0"/>
+                                            </p:txEl>
+                                          </p:spTgt>
+                                        </p:tgtEl>
+                                      </p:cBhvr>
+                                    </p:animEffect>
+                                  </p:childTnLst>
+                                </p:cTn>
+                              </p:par>
+                            </p:childTnLst>
+                          </p:cTn>
+                        </p:par>
+                      </p:childTnLst>
+                    </p:cTn>
+                  </p:par>
+                  <p:par>
+                    <p:cTn id="8" fill="hold">
+                      <p:stCondLst>
+                        <p:cond delay="indefinite"/>
+                      </p:stCondLst>
+                      <p:childTnLst>
+                        <p:par>
+                          <p:cTn id="9" fill="hold">
+                            <p:stCondLst>
+                              <p:cond delay="0"/>
+                            </p:stCondLst>
+                            <p:childTnLst>
+                              <p:par>
+                                <p:cTn id="10" presetID="10" presetClass="entr" presetSubtype="0" fill="hold" grpId="0" nodeType="clickEffect">
+                                  <p:stCondLst>
+                                    <p:cond delay="0"/>
+                                  </p:stCondLst>
+                                  <p:childTnLst>
+                                    <p:set>
+                                      <p:cBhvr>
+                                        <p:cTn id="11" dur="1" fill="hold">
+                                          <p:stCondLst>
+                                            <p:cond delay="0"/>
+                                          </p:stCondLst>
+                                        </p:cTn>
+                                        <p:tgtEl>
+                                          <p:spTgt spid="18">
+                                            <p:txEl>
+                                              <p:pRg st="1" end="1"/>
+                                            </p:txEl>
+                                          </p:spTgt>
+                                        </p:tgtEl>
+                                        <p:attrNameLst>
+                                          <p:attrName>style.visibility</p:attrName>
+                                        </p:attrNameLst>
+                                      </p:cBhvr>
+                                      <p:to>
+                                        <p:strVal val="visible"/>
+                                      </p:to>
+                                    </p:set>
+                                    <p:animEffect transition="in" filter="fade">
+                                      <p:cBhvr>
+                                        <p:cTn id="12" dur="500"/>
+                                        <p:tgtEl>
+                                          <p:spTgt spid="18">
+                                            <p:txEl>
+                                              <p:pRg st="1" end="1"/>
+                                            </p:txEl>
+                                          </p:spTgt>
+                                        </p:tgtEl>
+                                      </p:cBhvr>
+                                    </p:animEffect>
+                                  </p:childTnLst>
+                                </p:cTn>
+                              </p:par>
+                            </p:childTnLst>
+                          </p:cTn>
+                        </p:par>
+                      </p:childTnLst>
+                    </p:cTn>
+                  </p:par>
+                  <p:par>
+                    <p:cTn id="13" fill="hold">
+                      <p:stCondLst>
+                        <p:cond delay="indefinite"/>
+                      </p:stCondLst>
+                      <p:childTnLst>
+                        <p:par>
+                          <p:cTn id="14" fill="hold">
+                            <p:stCondLst>
+                              <p:cond delay="0"/>
+                            </p:stCondLst>
+                            <p:childTnLst>
+                              <p:par>
+                                <p:cTn id="15" presetID="10" presetClass="entr" presetSubtype="0" fill="hold" grpId="0" nodeType="clickEffect">
+                                  <p:stCondLst>
+                                    <p:cond delay="0"/>
+                                  </p:stCondLst>
+                                  <p:childTnLst>
+                                    <p:set>
+                                      <p:cBhvr>
+                                        <p:cTn id="16" dur="1" fill="hold">
+                                          <p:stCondLst>
+                                            <p:cond delay="0"/>
+                                          </p:stCondLst>
+                                        </p:cTn>
+                                        <p:tgtEl>
+                                          <p:spTgt spid="18">
+                                            <p:txEl>
+                                              <p:pRg st="2" end="2"/>
+                                            </p:txEl>
+                                          </p:spTgt>
+                                        </p:tgtEl>
+                                        <p:attrNameLst>
+                                          <p:attrName>style.visibility</p:attrName>
+                                        </p:attrNameLst>
+                                      </p:cBhvr>
+                                      <p:to>
+                                        <p:strVal val="visible"/>
+                                      </p:to>
+                                    </p:set>
+                                    <p:animEffect transition="in" filter="fade">
+                                      <p:cBhvr>
+                                        <p:cTn id="17" dur="500"/>
+                                        <p:tgtEl>
+                                          <p:spTgt spid="18">
+                                            <p:txEl>
+                                              <p:pRg st="2" end="2"/>
+                                            </p:txEl>
+                                          </p:spTgt>
+                                        </p:tgtEl>
+                                      </p:cBhvr>
+                                    </p:animEffect>
+                                  </p:childTnLst>
+                                </p:cTn>
+                              </p:par>
+                            </p:childTnLst>
+                          </p:cTn>
+                        </p:par>
+                      </p:childTnLst>
+                    </p:cTn>
+                  </p:par>
+                  <p:par>
+                    <p:cTn id="18" fill="hold">
+                      <p:stCondLst>
+                        <p:cond delay="indefinite"/>
+                      </p:stCondLst>
+                      <p:childTnLst>
+                        <p:par>
+                          <p:cTn id="19" fill="hold">
+                            <p:stCondLst>
+                              <p:cond delay="0"/>
+                            </p:stCondLst>
+                            <p:childTnLst>
+                              <p:par>
+                                <p:cTn id="20" presetID="10" presetClass="entr" presetSubtype="0" fill="hold" grpId="0" nodeType="clickEffect">
+                                  <p:stCondLst>
+                                    <p:cond delay="0"/>
+                                  </p:stCondLst>
+                                  <p:childTnLst>
+                                    <p:set>
+                                      <p:cBhvr>
+                                        <p:cTn id="21" dur="1" fill="hold">
+                                          <p:stCondLst>
+                                            <p:cond delay="0"/>
+                                          </p:stCondLst>
+                                        </p:cTn>
+                                        <p:tgtEl>
+                                          <p:spTgt spid="18">
+                                            <p:txEl>
+                                              <p:pRg st="3" end="3"/>
+                                            </p:txEl>
+                                          </p:spTgt>
+                                        </p:tgtEl>
+                                        <p:attrNameLst>
+                                          <p:attrName>style.visibility</p:attrName>
+                                        </p:attrNameLst>
+                                      </p:cBhvr>
+                                      <p:to>
+                                        <p:strVal val="visible"/>
+                                      </p:to>
+                                    </p:set>
+                                    <p:animEffect transition="in" filter="fade">
+                                      <p:cBhvr>
+                                        <p:cTn id="22" dur="500"/>
+                                        <p:tgtEl>
+                                          <p:spTgt spid="18">
+                                            <p:txEl>
+                                              <p:pRg st="3" end="3"/>
+                                            </p:txEl>
+                                          </p:spTgt>
+                                        </p:tgtEl>
+                                      </p:cBhvr>
+                                    </p:animEffect>
+                                  </p:childTnLst>
+                                </p:cTn>
+                              </p:par>
+                            </p:childTnLst>
+                          </p:cTn>
+                        </p:par>
+                      </p:childTnLst>
+                    </p:cTn>
+                  </p:par>
+                  <p:par>
+                    <p:cTn id="23" fill="hold">
+                      <p:stCondLst>
+                        <p:cond delay="indefinite"/>
+                      </p:stCondLst>
+                      <p:childTnLst>
+                        <p:par>
+                          <p:cTn id="24" fill="hold">
+                            <p:stCondLst>
+                              <p:cond delay="0"/>
+                            </p:stCondLst>
+                            <p:childTnLst>
+                              <p:par>
+                                <p:cTn id="25" presetID="10" presetClass="entr" presetSubtype="0" fill="hold" grpId="0" nodeType="clickEffect">
+                                  <p:stCondLst>
+                                    <p:cond delay="0"/>
+                                  </p:stCondLst>
+                                  <p:childTnLst>
+                                    <p:set>
+                                      <p:cBhvr>
+                                        <p:cTn id="26" dur="1" fill="hold">
+                                          <p:stCondLst>
+                                            <p:cond delay="0"/>
+                                          </p:stCondLst>
+                                        </p:cTn>
+                                        <p:tgtEl>
+                                          <p:spTgt spid="18">
+                                            <p:txEl>
+                                              <p:pRg st="5" end="5"/>
+                                            </p:txEl>
+                                          </p:spTgt>
+                                        </p:tgtEl>
+                                        <p:attrNameLst>
+                                          <p:attrName>style.visibility</p:attrName>
+                                        </p:attrNameLst>
+                                      </p:cBhvr>
+                                      <p:to>
+                                        <p:strVal val="visible"/>
+                                      </p:to>
+                                    </p:set>
+                                    <p:animEffect transition="in" filter="fade">
+                                      <p:cBhvr>
+                                        <p:cTn id="27" dur="500"/>
+                                        <p:tgtEl>
+                                          <p:spTgt spid="18">
+                                            <p:txEl>
+                                              <p:pRg st="5" end="5"/>
+                                            </p:txEl>
+                                          </p:spTgt>
+                                        </p:tgtEl>
+                                      </p:cBhvr>
+                                    </p:animEffect>
+                                  </p:childTnLst>
+                                </p:cTn>
+                              </p:par>
+                            </p:childTnLst>
+                          </p:cTn>
+                        </p:par>
+                      </p:childTnLst>
+                    </p:cTn>
+                  </p:par>
+                  <p:par>
+                    <p:cTn id="28" fill="hold">
+                      <p:stCondLst>
+                        <p:cond delay="indefinite"/>
+                      </p:stCondLst>
+                      <p:childTnLst>
+                        <p:par>
+                          <p:cTn id="29" fill="hold">
+                            <p:stCondLst>
+                              <p:cond delay="0"/>
+                            </p:stCondLst>
+                            <p:childTnLst>
+                              <p:par>
+                                <p:cTn id="30" presetID="10" presetClass="entr" presetSubtype="0" fill="hold" grpId="0" nodeType="clickEffect">
+                                  <p:stCondLst>
+                                    <p:cond delay="0"/>
+                                  </p:stCondLst>
+                                  <p:childTnLst>
+                                    <p:set>
+                                      <p:cBhvr>
+                                        <p:cTn id="31" dur="1" fill="hold">
+                                          <p:stCondLst>
+                                            <p:cond delay="0"/>
+                                          </p:stCondLst>
+                                        </p:cTn>
+                                        <p:tgtEl>
+                                          <p:spTgt spid="18">
+                                            <p:txEl>
+                                              <p:pRg st="6" end="6"/>
+                                            </p:txEl>
+                                          </p:spTgt>
+                                        </p:tgtEl>
+                                        <p:attrNameLst>
+                                          <p:attrName>style.visibility</p:attrName>
+                                        </p:attrNameLst>
+                                      </p:cBhvr>
+                                      <p:to>
+                                        <p:strVal val="visible"/>
+                                      </p:to>
+                                    </p:set>
+                                    <p:animEffect transition="in" filter="fade">
+                                      <p:cBhvr>
+                                        <p:cTn id="32" dur="500"/>
+                                        <p:tgtEl>
+                                          <p:spTgt spid="18">
+                                            <p:txEl>
+                                              <p:pRg st="6" end="6"/>
+                                            </p:txEl>
+                                          </p:spTgt>
+                                        </p:tgtEl>
+                                      </p:cBhvr>
+                                    </p:animEffect>
+                                  </p:childTnLst>
+                                </p:cTn>
+                              </p:par>
+                            </p:childTnLst>
+                          </p:cTn>
+                        </p:par>
+                      </p:childTnLst>
+                    </p:cTn>
+                  </p:par>
+                  <p:par>
+                    <p:cTn id="33" fill="hold">
+                      <p:stCondLst>
+                        <p:cond delay="indefinite"/>
+                      </p:stCondLst>
+                      <p:childTnLst>
+                        <p:par>
+                          <p:cTn id="34" fill="hold">
+                            <p:stCondLst>
+                              <p:cond delay="0"/>
+                            </p:stCondLst>
+                            <p:childTnLst>
+                              <p:par>
+                                <p:cTn id="35" presetID="10" presetClass="entr" presetSubtype="0" fill="hold" grpId="0" nodeType="clickEffect">
+                                  <p:stCondLst>
+                                    <p:cond delay="0"/>
+                                  </p:stCondLst>
+                                  <p:childTnLst>
+                                    <p:set>
+                                      <p:cBhvr>
+                                        <p:cTn id="36" dur="1" fill="hold">
+                                          <p:stCondLst>
+                                            <p:cond delay="0"/>
+                                          </p:stCondLst>
+                                        </p:cTn>
+                                        <p:tgtEl>
+                                          <p:spTgt spid="18">
+                                            <p:txEl>
+                                              <p:pRg st="7" end="7"/>
+                                            </p:txEl>
+                                          </p:spTgt>
+                                        </p:tgtEl>
+                                        <p:attrNameLst>
+                                          <p:attrName>style.visibility</p:attrName>
+                                        </p:attrNameLst>
+                                      </p:cBhvr>
+                                      <p:to>
+                                        <p:strVal val="visible"/>
+                                      </p:to>
+                                    </p:set>
+                                    <p:animEffect transition="in" filter="fade">
+                                      <p:cBhvr>
+                                        <p:cTn id="37" dur="500"/>
+                                        <p:tgtEl>
+                                          <p:spTgt spid="18">
+                                            <p:txEl>
+                                              <p:pRg st="7" end="7"/>
+                                            </p:txEl>
+                                          </p:spTgt>
+                                        </p:tgtEl>
+                                      </p:cBhvr>
+                                    </p:animEffect>
+                                  </p:childTnLst>
+                                </p:cTn>
+                              </p:par>
+                            </p:childTnLst>
+                          </p:cTn>
+                        </p:par>
+                      </p:childTnLst>
+                    </p:cTn>
+                  </p:par>
+                  <p:par>
+                    <p:cTn id="38" fill="hold">
+                      <p:stCondLst>
+                        <p:cond delay="indefinite"/>
+                      </p:stCondLst>
+                      <p:childTnLst>
+                        <p:par>
+                          <p:cTn id="39" fill="hold">
+                            <p:stCondLst>
+                              <p:cond delay="0"/>
+                            </p:stCondLst>
+                            <p:childTnLst>
+                              <p:par>
+                                <p:cTn id="40" presetID="10" presetClass="entr" presetSubtype="0" fill="hold" grpId="0" nodeType="clickEffect">
+                                  <p:stCondLst>
+                                    <p:cond delay="0"/>
+                                  </p:stCondLst>
+                                  <p:childTnLst>
+                                    <p:set>
+                                      <p:cBhvr>
+                                        <p:cTn id="41" dur="1" fill="hold">
+                                          <p:stCondLst>
+                                            <p:cond delay="0"/>
+                                          </p:stCondLst>
+                                        </p:cTn>
+                                        <p:tgtEl>
+                                          <p:spTgt spid="18">
+                                            <p:txEl>
+                                              <p:pRg st="9" end="9"/>
+                                            </p:txEl>
+                                          </p:spTgt>
+                                        </p:tgtEl>
+                                        <p:attrNameLst>
+                                          <p:attrName>style.visibility</p:attrName>
+                                        </p:attrNameLst>
+                                      </p:cBhvr>
+                                      <p:to>
+                                        <p:strVal val="visible"/>
+                                      </p:to>
+                                    </p:set>
+                                    <p:animEffect transition="in" filter="fade">
+                                      <p:cBhvr>
+                                        <p:cTn id="42" dur="500"/>
+                                        <p:tgtEl>
+                                          <p:spTgt spid="18">
+                                            <p:txEl>
+                                              <p:pRg st="9" end="9"/>
+                                            </p:txEl>
+                                          </p:spTgt>
+                                        </p:tgtEl>
+                                      </p:cBhvr>
+                                    </p:animEffect>
+                                  </p:childTnLst>
+                                </p:cTn>
+                              </p:par>
+                            </p:childTnLst>
+                          </p:cTn>
+                        </p:par>
+                      </p:childTnLst>
+                    </p:cTn>
+                  </p:par>
+                  <p:par>
+                    <p:cTn id="43" fill="hold">
+                      <p:stCondLst>
+                        <p:cond delay="indefinite"/>
+                      </p:stCondLst>
+                      <p:childTnLst>
+                        <p:par>
+                          <p:cTn id="44" fill="hold">
+                            <p:stCondLst>
+                              <p:cond delay="0"/>
+                            </p:stCondLst>
+                            <p:childTnLst>
+                              <p:par>
+                                <p:cTn id="45" presetID="10" presetClass="entr" presetSubtype="0" fill="hold" grpId="0" nodeType="clickEffect">
+                                  <p:stCondLst>
+                                    <p:cond delay="0"/>
+                                  </p:stCondLst>
+                                  <p:childTnLst>
+                                    <p:set>
+                                      <p:cBhvr>
+                                        <p:cTn id="46" dur="1" fill="hold">
+                                          <p:stCondLst>
+                                            <p:cond delay="0"/>
+                                          </p:stCondLst>
+                                        </p:cTn>
+                                        <p:tgtEl>
+                                          <p:spTgt spid="18">
+                                            <p:txEl>
+                                              <p:pRg st="10" end="10"/>
+                                            </p:txEl>
+                                          </p:spTgt>
+                                        </p:tgtEl>
+                                        <p:attrNameLst>
+                                          <p:attrName>style.visibility</p:attrName>
+                                        </p:attrNameLst>
+                                      </p:cBhvr>
+                                      <p:to>
+                                        <p:strVal val="visible"/>
+                                      </p:to>
+                                    </p:set>
+                                    <p:animEffect transition="in" filter="fade">
+                                      <p:cBhvr>
+                                        <p:cTn id="47" dur="500"/>
+                                        <p:tgtEl>
+                                          <p:spTgt spid="18">
+                                            <p:txEl>
+                                              <p:pRg st="10" end="10"/>
+                                            </p:txEl>
+                                          </p:spTgt>
+                                        </p:tgtEl>
+                                      </p:cBhvr>
+                                    </p:animEffect>
+                                  </p:childTnLst>
+                                </p:cTn>
+                              </p:par>
+                            </p:childTnLst>
+                          </p:cTn>
+                        </p:par>
+                      </p:childTnLst>
+                    </p:cTn>
+                  </p:par>
+                  <p:par>
+                    <p:cTn id="48" fill="hold">
+                      <p:stCondLst>
+                        <p:cond delay="indefinite"/>
+                      </p:stCondLst>
+                      <p:childTnLst>
+                        <p:par>
+                          <p:cTn id="49" fill="hold">
+                            <p:stCondLst>
+                              <p:cond delay="0"/>
+                            </p:stCondLst>
+                            <p:childTnLst>
+                              <p:par>
+                                <p:cTn id="50" presetID="10" presetClass="entr" presetSubtype="0" fill="hold" grpId="0" nodeType="clickEffect">
+                                  <p:stCondLst>
+                                    <p:cond delay="0"/>
+                                  </p:stCondLst>
+                                  <p:childTnLst>
+                                    <p:set>
+                                      <p:cBhvr>
+                                        <p:cTn id="51" dur="1" fill="hold">
+                                          <p:stCondLst>
+                                            <p:cond delay="0"/>
+                                          </p:stCondLst>
+                                        </p:cTn>
+                                        <p:tgtEl>
+                                          <p:spTgt spid="18">
+                                            <p:txEl>
+                                              <p:pRg st="11" end="11"/>
+                                            </p:txEl>
+                                          </p:spTgt>
+                                        </p:tgtEl>
+                                        <p:attrNameLst>
+                                          <p:attrName>style.visibility</p:attrName>
+                                        </p:attrNameLst>
+                                      </p:cBhvr>
+                                      <p:to>
+                                        <p:strVal val="visible"/>
+                                      </p:to>
+                                    </p:set>
+                                    <p:animEffect transition="in" filter="fade">
+                                      <p:cBhvr>
+                                        <p:cTn id="52" dur="500"/>
+                                        <p:tgtEl>
+                                          <p:spTgt spid="18">
+                                            <p:txEl>
+                                              <p:pRg st="11" end="11"/>
+                                            </p:txEl>
+                                          </p:spTgt>
+                                        </p:tgtEl>
+                                      </p:cBhvr>
+                                    </p:animEffect>
+                                  </p:childTnLst>
+                                </p:cTn>
+                              </p:par>
+                            </p:childTnLst>
+                          </p:cTn>
+                        </p:par>
+                      </p:childTnLst>
+                    </p:cTn>
+                  </p:par>
+                  <p:par>
+                    <p:cTn id="53" fill="hold">
+                      <p:stCondLst>
+                        <p:cond delay="indefinite"/>
+                      </p:stCondLst>
+                      <p:childTnLst>
+                        <p:par>
+                          <p:cTn id="54" fill="hold">
+                            <p:stCondLst>
+                              <p:cond delay="0"/>
+                            </p:stCondLst>
+                            <p:childTnLst>
+                              <p:par>
+                                <p:cTn id="55" presetID="10" presetClass="entr" presetSubtype="0" fill="hold" grpId="0" nodeType="clickEffect">
+                                  <p:stCondLst>
+                                    <p:cond delay="0"/>
+                                  </p:stCondLst>
+                                  <p:childTnLst>
+                                    <p:set>
+                                      <p:cBhvr>
+                                        <p:cTn id="56" dur="1" fill="hold">
+                                          <p:stCondLst>
+                                            <p:cond delay="0"/>
+                                          </p:stCondLst>
+                                        </p:cTn>
+                                        <p:tgtEl>
+                                          <p:spTgt spid="18">
+                                            <p:txEl>
+                                              <p:pRg st="12" end="12"/>
+                                            </p:txEl>
+                                          </p:spTgt>
+                                        </p:tgtEl>
+                                        <p:attrNameLst>
+                                          <p:attrName>style.visibility</p:attrName>
+                                        </p:attrNameLst>
+                                      </p:cBhvr>
+                                      <p:to>
+                                        <p:strVal val="visible"/>
+                                      </p:to>
+                                    </p:set>
+                                    <p:animEffect transition="in" filter="fade">
+                                      <p:cBhvr>
+                                        <p:cTn id="57" dur="500"/>
+                                        <p:tgtEl>
+                                          <p:spTgt spid="18">
+                                            <p:txEl>
+                                              <p:pRg st="12" end="12"/>
+                                            </p:txEl>
+                                          </p:spTgt>
+                                        </p:tgtEl>
+                                      </p:cBhvr>
+                                    </p:animEffect>
+                                  </p:childTnLst>
+                                </p:cTn>
+                              </p:par>
+                            </p:childTnLst>
+                          </p:cTn>
+                        </p:par>
+                      </p:childTnLst>
+                    </p:cTn>
+                  </p:par>
+                  <p:par>
+                    <p:cTn id="58" fill="hold">
+                      <p:stCondLst>
+                        <p:cond delay="indefinite"/>
+                      </p:stCondLst>
+                      <p:childTnLst>
+                        <p:par>
+                          <p:cTn id="59" fill="hold">
+                            <p:stCondLst>
+                              <p:cond delay="0"/>
+                            </p:stCondLst>
+                            <p:childTnLst>
+                              <p:par>
+                                <p:cTn id="60" presetID="10" presetClass="entr" presetSubtype="0" fill="hold" grpId="0" nodeType="clickEffect">
+                                  <p:stCondLst>
+                                    <p:cond delay="0"/>
+                                  </p:stCondLst>
+                                  <p:childTnLst>
+                                    <p:set>
+                                      <p:cBhvr>
+                                        <p:cTn id="61" dur="1" fill="hold">
+                                          <p:stCondLst>
+                                            <p:cond delay="0"/>
+                                          </p:stCondLst>
+                                        </p:cTn>
+                                        <p:tgtEl>
+                                          <p:spTgt spid="18">
+                                            <p:txEl>
+                                              <p:pRg st="13" end="13"/>
+                                            </p:txEl>
+                                          </p:spTgt>
+                                        </p:tgtEl>
+                                        <p:attrNameLst>
+                                          <p:attrName>style.visibility</p:attrName>
+                                        </p:attrNameLst>
+                                      </p:cBhvr>
+                                      <p:to>
+                                        <p:strVal val="visible"/>
+                                      </p:to>
+                                    </p:set>
+                                    <p:animEffect transition="in" filter="fade">
+                                      <p:cBhvr>
+                                        <p:cTn id="62" dur="500"/>
+                                        <p:tgtEl>
+                                          <p:spTgt spid="18">
+                                            <p:txEl>
+                                              <p:pRg st="13" end="13"/>
+                                            </p:txEl>
+                                          </p:spTgt>
+                                        </p:tgtEl>
+                                      </p:cBhvr>
+                                    </p:animEffect>
+                                  </p:childTnLst>
+                                </p:cTn>
+                              </p:par>
+                            </p:childTnLst>
+                          </p:cTn>
+                        </p:par>
+                      </p:childTnLst>
+                    </p:cTn>
+                  </p:par>
+                  <p:par>
+                    <p:cTn id="63" fill="hold">
+                      <p:stCondLst>
+                        <p:cond delay="indefinite"/>
+                      </p:stCondLst>
+                      <p:childTnLst>
+                        <p:par>
+                          <p:cTn id="64" fill="hold">
+                            <p:stCondLst>
+                              <p:cond delay="0"/>
+                            </p:stCondLst>
+                            <p:childTnLst>
+                              <p:par>
+                                <p:cTn id="65" presetID="10" presetClass="entr" presetSubtype="0" fill="hold" grpId="0" nodeType="clickEffect">
+                                  <p:stCondLst>
+                                    <p:cond delay="0"/>
+                                  </p:stCondLst>
+                                  <p:childTnLst>
+                                    <p:set>
+                                      <p:cBhvr>
+                                        <p:cTn id="66" dur="1" fill="hold">
+                                          <p:stCondLst>
+                                            <p:cond delay="0"/>
+                                          </p:stCondLst>
+                                        </p:cTn>
+                                        <p:tgtEl>
+                                          <p:spTgt spid="18">
+                                            <p:txEl>
+                                              <p:pRg st="15" end="15"/>
+                                            </p:txEl>
+                                          </p:spTgt>
+                                        </p:tgtEl>
+                                        <p:attrNameLst>
+                                          <p:attrName>style.visibility</p:attrName>
+                                        </p:attrNameLst>
+                                      </p:cBhvr>
+                                      <p:to>
+                                        <p:strVal val="visible"/>
+                                      </p:to>
+                                    </p:set>
+                                    <p:animEffect transition="in" filter="fade">
+                                      <p:cBhvr>
+                                        <p:cTn id="67" dur="500"/>
+                                        <p:tgtEl>
+                                          <p:spTgt spid="18">
+                                            <p:txEl>
+                                              <p:pRg st="15" end="15"/>
+                                            </p:txEl>
+                                          </p:spTgt>
+                                        </p:tgtEl>
+                                      </p:cBhvr>
+                                    </p:animEffect>
+                                  </p:childTnLst>
+                                </p:cTn>
+                              </p:par>
+                            </p:childTnLst>
+                          </p:cTn>
+                        </p:par>
+                      </p:childTnLst>
+                    </p:cTn>
+                  </p:par>
+                  <p:par>
+                    <p:cTn id="68" fill="hold">
+                      <p:stCondLst>
+                        <p:cond delay="indefinite"/>
+                      </p:stCondLst>
+                      <p:childTnLst>
+                        <p:par>
+                          <p:cTn id="69" fill="hold">
+                            <p:stCondLst>
+                              <p:cond delay="0"/>
+                            </p:stCondLst>
+                            <p:childTnLst>
+                              <p:par>
+                                <p:cTn id="70" presetID="10" presetClass="entr" presetSubtype="0" fill="hold" grpId="0" nodeType="clickEffect">
+                                  <p:stCondLst>
+                                    <p:cond delay="0"/>
+                                  </p:stCondLst>
+                                  <p:childTnLst>
+                                    <p:set>
+                                      <p:cBhvr>
+                                        <p:cTn id="71" dur="1" fill="hold">
+                                          <p:stCondLst>
+                                            <p:cond delay="0"/>
+                                          </p:stCondLst>
+                                        </p:cTn>
+                                        <p:tgtEl>
+                                          <p:spTgt spid="18">
+                                            <p:txEl>
+                                              <p:pRg st="16" end="16"/>
+                                            </p:txEl>
+                                          </p:spTgt>
+                                        </p:tgtEl>
+                                        <p:attrNameLst>
+                                          <p:attrName>style.visibility</p:attrName>
+                                        </p:attrNameLst>
+                                      </p:cBhvr>
+                                      <p:to>
+                                        <p:strVal val="visible"/>
+                                      </p:to>
+                                    </p:set>
+                                    <p:animEffect transition="in" filter="fade">
+                                      <p:cBhvr>
+                                        <p:cTn id="72" dur="500"/>
+                                        <p:tgtEl>
+                                          <p:spTgt spid="18">
+                                            <p:txEl>
+                                              <p:pRg st="16" end="16"/>
+                                            </p:txEl>
+                                          </p:spTgt>
+                                        </p:tgtEl>
+                                      </p:cBhvr>
+                                    </p:animEffect>
+                                  </p:childTnLst>
+                                </p:cTn>
+                              </p:par>
+                            </p:childTnLst>
+                          </p:cTn>
+                        </p:par>
+                      </p:childTnLst>
+                    </p:cTn>
+                  </p:par>
+                  <p:par>
+                    <p:cTn id="73" fill="hold">
+                      <p:stCondLst>
+                        <p:cond delay="indefinite"/>
+                      </p:stCondLst>
+                      <p:childTnLst>
+                        <p:par>
+                          <p:cTn id="74" fill="hold">
+                            <p:stCondLst>
+                              <p:cond delay="0"/>
+                            </p:stCondLst>
+                            <p:childTnLst>
+                              <p:par>
+                                <p:cTn id="75" presetID="10" presetClass="entr" presetSubtype="0" fill="hold" grpId="0" nodeType="clickEffect">
+                                  <p:stCondLst>
+                                    <p:cond delay="0"/>
+                                  </p:stCondLst>
+                                  <p:childTnLst>
+                                    <p:set>
+                                      <p:cBhvr>
+                                        <p:cTn id="76" dur="1" fill="hold">
+                                          <p:stCondLst>
+                                            <p:cond delay="0"/>
+                                          </p:stCondLst>
+                                        </p:cTn>
+                                        <p:tgtEl>
+                                          <p:spTgt spid="18">
+                                            <p:txEl>
+                                              <p:pRg st="17" end="17"/>
+                                            </p:txEl>
+                                          </p:spTgt>
+                                        </p:tgtEl>
+                                        <p:attrNameLst>
+                                          <p:attrName>style.visibility</p:attrName>
+                                        </p:attrNameLst>
+                                      </p:cBhvr>
+                                      <p:to>
+                                        <p:strVal val="visible"/>
+                                      </p:to>
+                                    </p:set>
+                                    <p:animEffect transition="in" filter="fade">
+                                      <p:cBhvr>
+                                        <p:cTn id="77" dur="500"/>
+                                        <p:tgtEl>
+                                          <p:spTgt spid="18">
+                                            <p:txEl>
+                                              <p:pRg st="17" end="17"/>
+                                            </p:txEl>
+                                          </p:spTgt>
+                                        </p:tgtEl>
+                                      </p:cBhvr>
+                                    </p:animEffect>
+                                  </p:childTnLst>
+                                </p:cTn>
+                              </p:par>
+                            </p:childTnLst>
+                          </p:cTn>
+                        </p:par>
+                      </p:childTnLst>
+                    </p:cTn>
+                  </p:par>
+                  <p:par>
+                    <p:cTn id="78" fill="hold">
+                      <p:stCondLst>
+                        <p:cond delay="indefinite"/>
+                      </p:stCondLst>
+                      <p:childTnLst>
+                        <p:par>
+                          <p:cTn id="79" fill="hold">
+                            <p:stCondLst>
+                              <p:cond delay="0"/>
+                            </p:stCondLst>
+                            <p:childTnLst>
+                              <p:par>
+                                <p:cTn id="80" presetID="10" presetClass="entr" presetSubtype="0" fill="hold" grpId="0" nodeType="clickEffect">
+                                  <p:stCondLst>
+                                    <p:cond delay="0"/>
+                                  </p:stCondLst>
+                                  <p:childTnLst>
+                                    <p:set>
+                                      <p:cBhvr>
+                                        <p:cTn id="81" dur="1" fill="hold">
+                                          <p:stCondLst>
+                                            <p:cond delay="0"/>
+                                          </p:stCondLst>
+                                        </p:cTn>
+                                        <p:tgtEl>
+                                          <p:spTgt spid="18">
+                                            <p:txEl>
+                                              <p:pRg st="18" end="18"/>
+                                            </p:txEl>
+                                          </p:spTgt>
+                                        </p:tgtEl>
+                                        <p:attrNameLst>
+                                          <p:attrName>style.visibility</p:attrName>
+                                        </p:attrNameLst>
+                                      </p:cBhvr>
+                                      <p:to>
+                                        <p:strVal val="visible"/>
+                                      </p:to>
+                                    </p:set>
+                                    <p:animEffect transition="in" filter="fade">
+                                      <p:cBhvr>
+                                        <p:cTn id="82" dur="500"/>
+                                        <p:tgtEl>
+                                          <p:spTgt spid="18">
+                                            <p:txEl>
+                                              <p:pRg st="18" end="18"/>
+                                            </p:txEl>
+                                          </p:spTgt>
+                                        </p:tgtEl>
+                                      </p:cBhvr>
+                                    </p:animEffect>
+                                  </p:childTnLst>
+                                </p:cTn>
+                              </p:par>
+                              <p:par>
+                                <p:cTn id="83" presetID="10" presetClass="entr" presetSubtype="0" fill="hold" grpId="0" nodeType="withEffect">
+                                  <p:stCondLst>
+                                    <p:cond delay="0"/>
+                                  </p:stCondLst>
+                                  <p:childTnLst>
+                                    <p:set>
+                                      <p:cBhvr>
+                                        <p:cTn id="84" dur="1" fill="hold">
+                                          <p:stCondLst>
+                                            <p:cond delay="0"/>
+                                          </p:stCondLst>
+                                        </p:cTn>
+                                        <p:tgtEl>
+                                          <p:spTgt spid="20">
+                                            <p:txEl>
+                                              <p:pRg st="0" end="0"/>
+                                            </p:txEl>
+                                          </p:spTgt>
+                                        </p:tgtEl>
+                                        <p:attrNameLst>
+                                          <p:attrName>style.visibility</p:attrName>
+                                        </p:attrNameLst>
+                                      </p:cBhvr>
+                                      <p:to>
+                                        <p:strVal val="visible"/>
+                                      </p:to>
+                                    </p:set>
+                                    <p:animEffect transition="in" filter="fade">
+                                      <p:cBhvr>
+                                        <p:cTn id="85" dur="500"/>
+                                        <p:tgtEl>
+                                          <p:spTgt spid="20">
+                                            <p:txEl>
+                                              <p:pRg st="0" end="0"/>
+                                            </p:txEl>
+                                          </p:spTgt>
+                                        </p:tgtEl>
+                                      </p:cBhvr>
+                                    </p:animEffect>
+                                  </p:childTnLst>
+                                </p:cTn>
+                              </p:par>
+                            </p:childTnLst>
+                          </p:cTn>
+                        </p:par>
+                      </p:childTnLst>
+                    </p:cTn>
+                  </p:par>
+                  <p:par>
+                    <p:cTn id="86" fill="hold">
+                      <p:stCondLst>
+                        <p:cond delay="indefinite"/>
+                      </p:stCondLst>
+                      <p:childTnLst>
+                        <p:par>
+                          <p:cTn id="87" fill="hold">
+                            <p:stCondLst>
+                              <p:cond delay="0"/>
+                            </p:stCondLst>
+                            <p:childTnLst>
+                              <p:par>
+                                <p:cTn id="88" presetID="10" presetClass="entr" presetSubtype="0" fill="hold" grpId="0" nodeType="clickEffect">
+                                  <p:stCondLst>
+                                    <p:cond delay="0"/>
+                                  </p:stCondLst>
+                                  <p:childTnLst>
+                                    <p:set>
+                                      <p:cBhvr>
+                                        <p:cTn id="89" dur="1" fill="hold">
+                                          <p:stCondLst>
+                                            <p:cond delay="0"/>
+                                          </p:stCondLst>
+                                        </p:cTn>
+                                        <p:tgtEl>
+                                          <p:spTgt spid="20">
+                                            <p:txEl>
+                                              <p:pRg st="1" end="1"/>
+                                            </p:txEl>
+                                          </p:spTgt>
+                                        </p:tgtEl>
+                                        <p:attrNameLst>
+                                          <p:attrName>style.visibility</p:attrName>
+                                        </p:attrNameLst>
+                                      </p:cBhvr>
+                                      <p:to>
+                                        <p:strVal val="visible"/>
+                                      </p:to>
+                                    </p:set>
+                                    <p:animEffect transition="in" filter="fade">
+                                      <p:cBhvr>
+                                        <p:cTn id="90" dur="500"/>
+                                        <p:tgtEl>
+                                          <p:spTgt spid="20">
+                                            <p:txEl>
+                                              <p:pRg st="1" end="1"/>
+                                            </p:txEl>
+                                          </p:spTgt>
+                                        </p:tgtEl>
+                                      </p:cBhvr>
+                                    </p:animEffect>
+                                  </p:childTnLst>
+                                </p:cTn>
+                              </p:par>
+                            </p:childTnLst>
+                          </p:cTn>
+                        </p:par>
+                      </p:childTnLst>
+                    </p:cTn>
+                  </p:par>
+                  <p:par>
+                    <p:cTn id="91" fill="hold">
+                      <p:stCondLst>
+                        <p:cond delay="indefinite"/>
+                      </p:stCondLst>
+                      <p:childTnLst>
+                        <p:par>
+                          <p:cTn id="92" fill="hold">
+                            <p:stCondLst>
+                              <p:cond delay="0"/>
+                            </p:stCondLst>
+                            <p:childTnLst>
+                              <p:par>
+                                <p:cTn id="93" presetID="10" presetClass="entr" presetSubtype="0" fill="hold" grpId="0" nodeType="clickEffect">
+                                  <p:stCondLst>
+                                    <p:cond delay="0"/>
+                                  </p:stCondLst>
+                                  <p:childTnLst>
+                                    <p:set>
+                                      <p:cBhvr>
+                                        <p:cTn id="94" dur="1" fill="hold">
+                                          <p:stCondLst>
+                                            <p:cond delay="0"/>
+                                          </p:stCondLst>
+                                        </p:cTn>
+                                        <p:tgtEl>
+                                          <p:spTgt spid="20">
+                                            <p:txEl>
+                                              <p:pRg st="2" end="2"/>
+                                            </p:txEl>
+                                          </p:spTgt>
+                                        </p:tgtEl>
+                                        <p:attrNameLst>
+                                          <p:attrName>style.visibility</p:attrName>
+                                        </p:attrNameLst>
+                                      </p:cBhvr>
+                                      <p:to>
+                                        <p:strVal val="visible"/>
+                                      </p:to>
+                                    </p:set>
+                                    <p:animEffect transition="in" filter="fade">
+                                      <p:cBhvr>
+                                        <p:cTn id="95" dur="500"/>
+                                        <p:tgtEl>
+                                          <p:spTgt spid="20">
+                                            <p:txEl>
+                                              <p:pRg st="2" end="2"/>
+                                            </p:txEl>
+                                          </p:spTgt>
+                                        </p:tgtEl>
+                                      </p:cBhvr>
+                                    </p:animEffect>
+                                  </p:childTnLst>
+                                </p:cTn>
+                              </p:par>
+                            </p:childTnLst>
+                          </p:cTn>
+                        </p:par>
+                      </p:childTnLst>
+                    </p:cTn>
+                  </p:par>
+                  <p:par>
+                    <p:cTn id="96" fill="hold">
+                      <p:stCondLst>
+                        <p:cond delay="indefinite"/>
+                      </p:stCondLst>
+                      <p:childTnLst>
+                        <p:par>
+                          <p:cTn id="97" fill="hold">
+                            <p:stCondLst>
+                              <p:cond delay="0"/>
+                            </p:stCondLst>
+                            <p:childTnLst>
+                              <p:par>
+                                <p:cTn id="98" presetID="10" presetClass="entr" presetSubtype="0" fill="hold" grpId="0" nodeType="clickEffect">
+                                  <p:stCondLst>
+                                    <p:cond delay="0"/>
+                                  </p:stCondLst>
+                                  <p:childTnLst>
+                                    <p:set>
+                                      <p:cBhvr>
+                                        <p:cTn id="99" dur="1" fill="hold">
+                                          <p:stCondLst>
+                                            <p:cond delay="0"/>
+                                          </p:stCondLst>
+                                        </p:cTn>
+                                        <p:tgtEl>
+                                          <p:spTgt spid="20">
+                                            <p:txEl>
+                                              <p:pRg st="4" end="4"/>
+                                            </p:txEl>
+                                          </p:spTgt>
+                                        </p:tgtEl>
+                                        <p:attrNameLst>
+                                          <p:attrName>style.visibility</p:attrName>
+                                        </p:attrNameLst>
+                                      </p:cBhvr>
+                                      <p:to>
+                                        <p:strVal val="visible"/>
+                                      </p:to>
+                                    </p:set>
+                                    <p:animEffect transition="in" filter="fade">
+                                      <p:cBhvr>
+                                        <p:cTn id="100" dur="500"/>
+                                        <p:tgtEl>
+                                          <p:spTgt spid="20">
+                                            <p:txEl>
+                                              <p:pRg st="4" end="4"/>
+                                            </p:txEl>
+                                          </p:spTgt>
+                                        </p:tgtEl>
+                                      </p:cBhvr>
+                                    </p:animEffect>
+                                  </p:childTnLst>
+                                </p:cTn>
+                              </p:par>
+                            </p:childTnLst>
+                          </p:cTn>
+                        </p:par>
+                      </p:childTnLst>
+                    </p:cTn>
+                  </p:par>
+                  <p:par>
+                    <p:cTn id="101" fill="hold">
+                      <p:stCondLst>
+                        <p:cond delay="indefinite"/>
+                      </p:stCondLst>
+                      <p:childTnLst>
+                        <p:par>
+                          <p:cTn id="102" fill="hold">
+                            <p:stCondLst>
+                              <p:cond delay="0"/>
+                            </p:stCondLst>
+                            <p:childTnLst>
+                              <p:par>
+                                <p:cTn id="103" presetID="10" presetClass="entr" presetSubtype="0" fill="hold" grpId="0" nodeType="clickEffect">
+                                  <p:stCondLst>
+                                    <p:cond delay="0"/>
+                                  </p:stCondLst>
+                                  <p:childTnLst>
+                                    <p:set>
+                                      <p:cBhvr>
+                                        <p:cTn id="104" dur="1" fill="hold">
+                                          <p:stCondLst>
+                                            <p:cond delay="0"/>
+                                          </p:stCondLst>
+                                        </p:cTn>
+                                        <p:tgtEl>
+                                          <p:spTgt spid="20">
+                                            <p:txEl>
+                                              <p:pRg st="5" end="5"/>
+                                            </p:txEl>
+                                          </p:spTgt>
+                                        </p:tgtEl>
+                                        <p:attrNameLst>
+                                          <p:attrName>style.visibility</p:attrName>
+                                        </p:attrNameLst>
+                                      </p:cBhvr>
+                                      <p:to>
+                                        <p:strVal val="visible"/>
+                                      </p:to>
+                                    </p:set>
+                                    <p:animEffect transition="in" filter="fade">
+                                      <p:cBhvr>
+                                        <p:cTn id="105" dur="500"/>
+                                        <p:tgtEl>
+                                          <p:spTgt spid="20">
+                                            <p:txEl>
+                                              <p:pRg st="5" end="5"/>
+                                            </p:txEl>
+                                          </p:spTgt>
+                                        </p:tgtEl>
+                                      </p:cBhvr>
+                                    </p:animEffect>
+                                  </p:childTnLst>
+                                </p:cTn>
+                              </p:par>
+                            </p:childTnLst>
+                          </p:cTn>
+                        </p:par>
+                      </p:childTnLst>
+                    </p:cTn>
+                  </p:par>
+                  <p:par>
+                    <p:cTn id="106" fill="hold">
+                      <p:stCondLst>
+                        <p:cond delay="indefinite"/>
+                      </p:stCondLst>
+                      <p:childTnLst>
+                        <p:par>
+                          <p:cTn id="107" fill="hold">
+                            <p:stCondLst>
+                              <p:cond delay="0"/>
+                            </p:stCondLst>
+                            <p:childTnLst>
+                              <p:par>
+                                <p:cTn id="108" presetID="10" presetClass="entr" presetSubtype="0" fill="hold" grpId="0" nodeType="clickEffect">
+                                  <p:stCondLst>
+                                    <p:cond delay="0"/>
+                                  </p:stCondLst>
+                                  <p:childTnLst>
+                                    <p:set>
+                                      <p:cBhvr>
+                                        <p:cTn id="109" dur="1" fill="hold">
+                                          <p:stCondLst>
+                                            <p:cond delay="0"/>
+                                          </p:stCondLst>
+                                        </p:cTn>
+                                        <p:tgtEl>
+                                          <p:spTgt spid="20">
+                                            <p:txEl>
+                                              <p:pRg st="6" end="6"/>
+                                            </p:txEl>
+                                          </p:spTgt>
+                                        </p:tgtEl>
+                                        <p:attrNameLst>
+                                          <p:attrName>style.visibility</p:attrName>
+                                        </p:attrNameLst>
+                                      </p:cBhvr>
+                                      <p:to>
+                                        <p:strVal val="visible"/>
+                                      </p:to>
+                                    </p:set>
+                                    <p:animEffect transition="in" filter="fade">
+                                      <p:cBhvr>
+                                        <p:cTn id="110" dur="500"/>
+                                        <p:tgtEl>
+                                          <p:spTgt spid="20">
+                                            <p:txEl>
+                                              <p:pRg st="6" end="6"/>
+                                            </p:txEl>
+                                          </p:spTgt>
+                                        </p:tgtEl>
+                                      </p:cBhvr>
+                                    </p:animEffect>
+                                  </p:childTnLst>
+                                </p:cTn>
+                              </p:par>
+                            </p:childTnLst>
+                          </p:cTn>
+                        </p:par>
+                      </p:childTnLst>
+                    </p:cTn>
+                  </p:par>
+                  <p:par>
+                    <p:cTn id="111" fill="hold">
+                      <p:stCondLst>
+                        <p:cond delay="indefinite"/>
+                      </p:stCondLst>
+                      <p:childTnLst>
+                        <p:par>
+                          <p:cTn id="112" fill="hold">
+                            <p:stCondLst>
+                              <p:cond delay="0"/>
+                            </p:stCondLst>
+                            <p:childTnLst>
+                              <p:par>
+                                <p:cTn id="113" presetID="10" presetClass="entr" presetSubtype="0" fill="hold" grpId="0" nodeType="clickEffect">
+                                  <p:stCondLst>
+                                    <p:cond delay="0"/>
+                                  </p:stCondLst>
+                                  <p:childTnLst>
+                                    <p:set>
+                                      <p:cBhvr>
+                                        <p:cTn id="114" dur="1" fill="hold">
+                                          <p:stCondLst>
+                                            <p:cond delay="0"/>
+                                          </p:stCondLst>
+                                        </p:cTn>
+                                        <p:tgtEl>
+                                          <p:spTgt spid="20">
+                                            <p:txEl>
+                                              <p:pRg st="8" end="8"/>
+                                            </p:txEl>
+                                          </p:spTgt>
+                                        </p:tgtEl>
+                                        <p:attrNameLst>
+                                          <p:attrName>style.visibility</p:attrName>
+                                        </p:attrNameLst>
+                                      </p:cBhvr>
+                                      <p:to>
+                                        <p:strVal val="visible"/>
+                                      </p:to>
+                                    </p:set>
+                                    <p:animEffect transition="in" filter="fade">
+                                      <p:cBhvr>
+                                        <p:cTn id="115" dur="500"/>
+                                        <p:tgtEl>
+                                          <p:spTgt spid="20">
+                                            <p:txEl>
+                                              <p:pRg st="8" end="8"/>
+                                            </p:txEl>
+                                          </p:spTgt>
+                                        </p:tgtEl>
+                                      </p:cBhvr>
+                                    </p:animEffect>
+                                  </p:childTnLst>
+                                </p:cTn>
+                              </p:par>
+                            </p:childTnLst>
+                          </p:cTn>
+                        </p:par>
+                      </p:childTnLst>
+                    </p:cTn>
+                  </p:par>
+                  <p:par>
+                    <p:cTn id="116" fill="hold">
+                      <p:stCondLst>
+                        <p:cond delay="indefinite"/>
+                      </p:stCondLst>
+                      <p:childTnLst>
+                        <p:par>
+                          <p:cTn id="117" fill="hold">
+                            <p:stCondLst>
+                              <p:cond delay="0"/>
+                            </p:stCondLst>
+                            <p:childTnLst>
+                              <p:par>
+                                <p:cTn id="118" presetID="10" presetClass="entr" presetSubtype="0" fill="hold" grpId="0" nodeType="clickEffect">
+                                  <p:stCondLst>
+                                    <p:cond delay="0"/>
+                                  </p:stCondLst>
+                                  <p:childTnLst>
+                                    <p:set>
+                                      <p:cBhvr>
+                                        <p:cTn id="119" dur="1" fill="hold">
+                                          <p:stCondLst>
+                                            <p:cond delay="0"/>
+                                          </p:stCondLst>
+                                        </p:cTn>
+                                        <p:tgtEl>
+                                          <p:spTgt spid="20">
+                                            <p:txEl>
+                                              <p:pRg st="9" end="9"/>
+                                            </p:txEl>
+                                          </p:spTgt>
+                                        </p:tgtEl>
+                                        <p:attrNameLst>
+                                          <p:attrName>style.visibility</p:attrName>
+                                        </p:attrNameLst>
+                                      </p:cBhvr>
+                                      <p:to>
+                                        <p:strVal val="visible"/>
+                                      </p:to>
+                                    </p:set>
+                                    <p:animEffect transition="in" filter="fade">
+                                      <p:cBhvr>
+                                        <p:cTn id="120" dur="500"/>
+                                        <p:tgtEl>
+                                          <p:spTgt spid="20">
+                                            <p:txEl>
+                                              <p:pRg st="9" end="9"/>
+                                            </p:txEl>
+                                          </p:spTgt>
+                                        </p:tgtEl>
+                                      </p:cBhvr>
+                                    </p:animEffect>
+                                  </p:childTnLst>
+                                </p:cTn>
+                              </p:par>
+                            </p:childTnLst>
+                          </p:cTn>
+                        </p:par>
+                      </p:childTnLst>
+                    </p:cTn>
+                  </p:par>
+                  <p:par>
+                    <p:cTn id="121" fill="hold">
+                      <p:stCondLst>
+                        <p:cond delay="indefinite"/>
+                      </p:stCondLst>
+                      <p:childTnLst>
+                        <p:par>
+                          <p:cTn id="122" fill="hold">
+                            <p:stCondLst>
+                              <p:cond delay="0"/>
+                            </p:stCondLst>
+                            <p:childTnLst>
+                              <p:par>
+                                <p:cTn id="123" presetID="10" presetClass="entr" presetSubtype="0" fill="hold" grpId="0" nodeType="clickEffect">
+                                  <p:stCondLst>
+                                    <p:cond delay="0"/>
+                                  </p:stCondLst>
+                                  <p:childTnLst>
+                                    <p:set>
+                                      <p:cBhvr>
+                                        <p:cTn id="124" dur="1" fill="hold">
+                                          <p:stCondLst>
+                                            <p:cond delay="0"/>
+                                          </p:stCondLst>
+                                        </p:cTn>
+                                        <p:tgtEl>
+                                          <p:spTgt spid="20">
+                                            <p:txEl>
+                                              <p:pRg st="10" end="10"/>
+                                            </p:txEl>
+                                          </p:spTgt>
+                                        </p:tgtEl>
+                                        <p:attrNameLst>
+                                          <p:attrName>style.visibility</p:attrName>
+                                        </p:attrNameLst>
+                                      </p:cBhvr>
+                                      <p:to>
+                                        <p:strVal val="visible"/>
+                                      </p:to>
+                                    </p:set>
+                                    <p:animEffect transition="in" filter="fade">
+                                      <p:cBhvr>
+                                        <p:cTn id="125" dur="500"/>
+                                        <p:tgtEl>
+                                          <p:spTgt spid="20">
+                                            <p:txEl>
+                                              <p:pRg st="10" end="10"/>
+                                            </p:txEl>
+                                          </p:spTgt>
+                                        </p:tgtEl>
+                                      </p:cBhvr>
+                                    </p:animEffect>
+                                  </p:childTnLst>
+                                </p:cTn>
+                              </p:par>
+                            </p:childTnLst>
+                          </p:cTn>
+                        </p:par>
+                      </p:childTnLst>
+                    </p:cTn>
+                  </p:par>
+                  <p:par>
+                    <p:cTn id="126" fill="hold">
+                      <p:stCondLst>
+                        <p:cond delay="indefinite"/>
+                      </p:stCondLst>
+                      <p:childTnLst>
+                        <p:par>
+                          <p:cTn id="127" fill="hold">
+                            <p:stCondLst>
+                              <p:cond delay="0"/>
+                            </p:stCondLst>
+                            <p:childTnLst>
+                              <p:par>
+                                <p:cTn id="128" presetID="10" presetClass="entr" presetSubtype="0" fill="hold" grpId="0" nodeType="clickEffect">
+                                  <p:stCondLst>
+                                    <p:cond delay="0"/>
+                                  </p:stCondLst>
+                                  <p:childTnLst>
+                                    <p:set>
+                                      <p:cBhvr>
+                                        <p:cTn id="129" dur="1" fill="hold">
+                                          <p:stCondLst>
+                                            <p:cond delay="0"/>
+                                          </p:stCondLst>
+                                        </p:cTn>
+                                        <p:tgtEl>
+                                          <p:spTgt spid="20">
+                                            <p:txEl>
+                                              <p:pRg st="12" end="12"/>
+                                            </p:txEl>
+                                          </p:spTgt>
+                                        </p:tgtEl>
+                                        <p:attrNameLst>
+                                          <p:attrName>style.visibility</p:attrName>
+                                        </p:attrNameLst>
+                                      </p:cBhvr>
+                                      <p:to>
+                                        <p:strVal val="visible"/>
+                                      </p:to>
+                                    </p:set>
+                                    <p:animEffect transition="in" filter="fade">
+                                      <p:cBhvr>
+                                        <p:cTn id="130" dur="500"/>
+                                        <p:tgtEl>
+                                          <p:spTgt spid="20">
+                                            <p:txEl>
+                                              <p:pRg st="12" end="12"/>
+                                            </p:txEl>
+                                          </p:spTgt>
+                                        </p:tgtEl>
+                                      </p:cBhvr>
+                                    </p:animEffect>
+                                  </p:childTnLst>
+                                </p:cTn>
+                              </p:par>
+                            </p:childTnLst>
+                          </p:cTn>
+                        </p:par>
+                      </p:childTnLst>
+                    </p:cTn>
+                  </p:par>
+                  <p:par>
+                    <p:cTn id="131" fill="hold">
+                      <p:stCondLst>
+                        <p:cond delay="indefinite"/>
+                      </p:stCondLst>
+                      <p:childTnLst>
+                        <p:par>
+                          <p:cTn id="132" fill="hold">
+                            <p:stCondLst>
+                              <p:cond delay="0"/>
+                            </p:stCondLst>
+                            <p:childTnLst>
+                              <p:par>
+                                <p:cTn id="133" presetID="10" presetClass="entr" presetSubtype="0" fill="hold" grpId="0" nodeType="clickEffect">
+                                  <p:stCondLst>
+                                    <p:cond delay="0"/>
+                                  </p:stCondLst>
+                                  <p:childTnLst>
+                                    <p:set>
+                                      <p:cBhvr>
+                                        <p:cTn id="134" dur="1" fill="hold">
+                                          <p:stCondLst>
+                                            <p:cond delay="0"/>
+                                          </p:stCondLst>
+                                        </p:cTn>
+                                        <p:tgtEl>
+                                          <p:spTgt spid="20">
+                                            <p:txEl>
+                                              <p:pRg st="13" end="13"/>
+                                            </p:txEl>
+                                          </p:spTgt>
+                                        </p:tgtEl>
+                                        <p:attrNameLst>
+                                          <p:attrName>style.visibility</p:attrName>
+                                        </p:attrNameLst>
+                                      </p:cBhvr>
+                                      <p:to>
+                                        <p:strVal val="visible"/>
+                                      </p:to>
+                                    </p:set>
+                                    <p:animEffect transition="in" filter="fade">
+                                      <p:cBhvr>
+                                        <p:cTn id="135" dur="500"/>
+                                        <p:tgtEl>
+                                          <p:spTgt spid="20">
+                                            <p:txEl>
+                                              <p:pRg st="13" end="13"/>
+                                            </p:txEl>
+                                          </p:spTgt>
+                                        </p:tgtEl>
+                                      </p:cBhvr>
+                                    </p:animEffect>
+                                  </p:childTnLst>
+                                </p:cTn>
+                              </p:par>
+                            </p:childTnLst>
+                          </p:cTn>
+                        </p:par>
+                      </p:childTnLst>
+                    </p:cTn>
+                  </p:par>
+                  <p:par>
+                    <p:cTn id="136" fill="hold">
+                      <p:stCondLst>
+                        <p:cond delay="indefinite"/>
+                      </p:stCondLst>
+                      <p:childTnLst>
+                        <p:par>
+                          <p:cTn id="137" fill="hold">
+                            <p:stCondLst>
+                              <p:cond delay="0"/>
+                            </p:stCondLst>
+                            <p:childTnLst>
+                              <p:par>
+                                <p:cTn id="138" presetID="10" presetClass="entr" presetSubtype="0" fill="hold" grpId="0" nodeType="clickEffect">
+                                  <p:stCondLst>
+                                    <p:cond delay="0"/>
+                                  </p:stCondLst>
+                                  <p:childTnLst>
+                                    <p:set>
+                                      <p:cBhvr>
+                                        <p:cTn id="139" dur="1" fill="hold">
+                                          <p:stCondLst>
+                                            <p:cond delay="0"/>
+                                          </p:stCondLst>
+                                        </p:cTn>
+                                        <p:tgtEl>
+                                          <p:spTgt spid="20">
+                                            <p:txEl>
+                                              <p:pRg st="14" end="14"/>
+                                            </p:txEl>
+                                          </p:spTgt>
+                                        </p:tgtEl>
+                                        <p:attrNameLst>
+                                          <p:attrName>style.visibility</p:attrName>
+                                        </p:attrNameLst>
+                                      </p:cBhvr>
+                                      <p:to>
+                                        <p:strVal val="visible"/>
+                                      </p:to>
+                                    </p:set>
+                                    <p:animEffect transition="in" filter="fade">
+                                      <p:cBhvr>
+                                        <p:cTn id="140" dur="500"/>
+                                        <p:tgtEl>
+                                          <p:spTgt spid="20">
+                                            <p:txEl>
+                                              <p:pRg st="14" end="14"/>
+                                            </p:txEl>
+                                          </p:spTgt>
+                                        </p:tgtEl>
+                                      </p:cBhvr>
+                                    </p:animEffect>
+                                  </p:childTnLst>
+                                </p:cTn>
+                              </p:par>
+                            </p:childTnLst>
+                          </p:cTn>
+                        </p:par>
+                      </p:childTnLst>
+                    </p:cTn>
+                  </p:par>
+                  <p:par>
+                    <p:cTn id="141" fill="hold">
+                      <p:stCondLst>
+                        <p:cond delay="indefinite"/>
+                      </p:stCondLst>
+                      <p:childTnLst>
+                        <p:par>
+                          <p:cTn id="142" fill="hold">
+                            <p:stCondLst>
+                              <p:cond delay="0"/>
+                            </p:stCondLst>
+                            <p:childTnLst>
+                              <p:par>
+                                <p:cTn id="143" presetID="10" presetClass="entr" presetSubtype="0" fill="hold" grpId="0" nodeType="clickEffect">
+                                  <p:stCondLst>
+                                    <p:cond delay="0"/>
+                                  </p:stCondLst>
+                                  <p:childTnLst>
+                                    <p:set>
+                                      <p:cBhvr>
+                                        <p:cTn id="144" dur="1" fill="hold">
+                                          <p:stCondLst>
+                                            <p:cond delay="0"/>
+                                          </p:stCondLst>
+                                        </p:cTn>
+                                        <p:tgtEl>
+                                          <p:spTgt spid="20">
+                                            <p:txEl>
+                                              <p:pRg st="16" end="16"/>
+                                            </p:txEl>
+                                          </p:spTgt>
+                                        </p:tgtEl>
+                                        <p:attrNameLst>
+                                          <p:attrName>style.visibility</p:attrName>
+                                        </p:attrNameLst>
+                                      </p:cBhvr>
+                                      <p:to>
+                                        <p:strVal val="visible"/>
+                                      </p:to>
+                                    </p:set>
+                                    <p:animEffect transition="in" filter="fade">
+                                      <p:cBhvr>
+                                        <p:cTn id="145" dur="500"/>
+                                        <p:tgtEl>
+                                          <p:spTgt spid="20">
+                                            <p:txEl>
+                                              <p:pRg st="16" end="16"/>
+                                            </p:txEl>
+                                          </p:spTgt>
+                                        </p:tgtEl>
+                                      </p:cBhvr>
+                                    </p:animEffect>
+                                  </p:childTnLst>
+                                </p:cTn>
+                              </p:par>
+                            </p:childTnLst>
+                          </p:cTn>
+                        </p:par>
+                      </p:childTnLst>
+                    </p:cTn>
+                  </p:par>
+                </p:childTnLst>
+              </p:cTn>
+              <p:prevCondLst>
+                <p:cond evt="onPrev" delay="0">
+                  <p:tgtEl>
+                    <p:sldTgt/>
+                  </p:tgtEl>
+                </p:cond>
+              </p:prevCondLst>
+              <p:nextCondLst>
+                <p:cond evt="onNext" delay="0">
+                  <p:tgtEl>
+                    <p:sldTgt/>
+                  </p:tgtEl>
+                </p:cond>
+              </p:nextCondLst>
+            </p:seq>
+          </p:childTnLst>
+        </p:cTn>
+      </p:par>
+    </p:tnLst>
+    <p:bldLst>
+      <p:bldP spid="18" grpId="0" build="p"/>
+      <p:bldP spid="20" grpId="0" build="p"/>
+    </p:bldLst>
+  </p:timing>
+</p:sld>
+</file>
+
+<file path=ppt/slides/slide4.xml><?xml version="1.0" encoding="utf-8"?>
+<p:sld xmlns:a="http://schemas.openxmlformats.org/drawingml/2006/main" xmlns:r="http://schemas.openxmlformats.org/officeDocument/2006/relationships" xmlns:p="http://schemas.openxmlformats.org/presentationml/2006/main">
+  <p:cSld>
+    <p:spTree>
+      <p:nvGrpSpPr>
+        <p:cNvPr id="1" name=""/>
+        <p:cNvGrpSpPr/>
+        <p:nvPr/>
+      </p:nvGrpSpPr>
+      <p:grpSpPr>
+        <a:xfrm>
+          <a:off x="0" y="0"/>
+          <a:ext cx="0" cy="0"/>
+          <a:chOff x="0" y="0"/>
+          <a:chExt cx="0" cy="0"/>
+        </a:xfrm>
+      </p:grpSpPr>
+      <p:sp>
+        <p:nvSpPr>
           <p:cNvPr id="12" name="Title 11">
             <a:extLst>
               <a:ext uri="{FF2B5EF4-FFF2-40B4-BE49-F238E27FC236}">
@@ -3744,7 +8044,7 @@
             </a:r>
             <a:r>
               <a:rPr lang="de-DE" sz="1800" dirty="0">
-                <a:hlinkClick r:id="rId2"/>
+                <a:hlinkClick r:id="rId3"/>
               </a:rPr>
               <a:t>https://alidxmt.github.io/data-analysis-course/setup-de/1-setup-python</a:t>
             </a:r>
@@ -3768,7 +8068,7 @@
             </a:r>
             <a:r>
               <a:rPr lang="de-DE" sz="1800" dirty="0">
-                <a:hlinkClick r:id="rId3"/>
+                <a:hlinkClick r:id="rId4"/>
               </a:rPr>
               <a:t>https://alidxmt.github.io/data-analysis-course/setup-de/2-setup-vscode</a:t>
             </a:r>
@@ -3792,7 +8092,7 @@
             </a:r>
             <a:r>
               <a:rPr lang="de-DE" sz="1800" dirty="0">
-                <a:hlinkClick r:id="rId4"/>
+                <a:hlinkClick r:id="rId5"/>
               </a:rPr>
               <a:t>https://alidxmt.github.io/data-analysis-course/setup-de/3-setup-git-env</a:t>
             </a:r>
@@ -4115,4 +8415,299 @@
     </a:ext>
   </a:extLst>
 </a:theme>
+</file>
+
+<file path=ppt/theme/theme2.xml><?xml version="1.0" encoding="utf-8"?>
+<a:theme xmlns:a="http://schemas.openxmlformats.org/drawingml/2006/main" name="Office Theme">
+  <a:themeElements>
+    <a:clrScheme name="Office">
+      <a:dk1>
+        <a:sysClr val="windowText" lastClr="000000"/>
+      </a:dk1>
+      <a:lt1>
+        <a:sysClr val="window" lastClr="FFFFFF"/>
+      </a:lt1>
+      <a:dk2>
+        <a:srgbClr val="44546A"/>
+      </a:dk2>
+      <a:lt2>
+        <a:srgbClr val="E7E6E6"/>
+      </a:lt2>
+      <a:accent1>
+        <a:srgbClr val="4472C4"/>
+      </a:accent1>
+      <a:accent2>
+        <a:srgbClr val="ED7D31"/>
+      </a:accent2>
+      <a:accent3>
+        <a:srgbClr val="A5A5A5"/>
+      </a:accent3>
+      <a:accent4>
+        <a:srgbClr val="FFC000"/>
+      </a:accent4>
+      <a:accent5>
+        <a:srgbClr val="5B9BD5"/>
+      </a:accent5>
+      <a:accent6>
+        <a:srgbClr val="70AD47"/>
+      </a:accent6>
+      <a:hlink>
+        <a:srgbClr val="0563C1"/>
+      </a:hlink>
+      <a:folHlink>
+        <a:srgbClr val="954F72"/>
+      </a:folHlink>
+    </a:clrScheme>
+    <a:fontScheme name="Office">
+      <a:majorFont>
+        <a:latin typeface="Calibri Light" panose="020F0302020204030204"/>
+        <a:ea typeface=""/>
+        <a:cs typeface=""/>
+        <a:font script="Jpan" typeface="游ゴシック Light"/>
+        <a:font script="Hang" typeface="맑은 고딕"/>
+        <a:font script="Hans" typeface="等线 Light"/>
+        <a:font script="Hant" typeface="新細明體"/>
+        <a:font script="Arab" typeface="Times New Roman"/>
+        <a:font script="Hebr" typeface="Times New Roman"/>
+        <a:font script="Thai" typeface="Angsana New"/>
+        <a:font script="Ethi" typeface="Nyala"/>
+        <a:font script="Beng" typeface="Vrinda"/>
+        <a:font script="Gujr" typeface="Shruti"/>
+        <a:font script="Khmr" typeface="MoolBoran"/>
+        <a:font script="Knda" typeface="Tunga"/>
+        <a:font script="Guru" typeface="Raavi"/>
+        <a:font script="Cans" typeface="Euphemia"/>
+        <a:font script="Cher" typeface="Plantagenet Cherokee"/>
+        <a:font script="Yiii" typeface="Microsoft Yi Baiti"/>
+        <a:font script="Tibt" typeface="Microsoft Himalaya"/>
+        <a:font script="Thaa" typeface="MV Boli"/>
+        <a:font script="Deva" typeface="Mangal"/>
+        <a:font script="Telu" typeface="Gautami"/>
+        <a:font script="Taml" typeface="Latha"/>
+        <a:font script="Syrc" typeface="Estrangelo Edessa"/>
+        <a:font script="Orya" typeface="Kalinga"/>
+        <a:font script="Mlym" typeface="Kartika"/>
+        <a:font script="Laoo" typeface="DokChampa"/>
+        <a:font script="Sinh" typeface="Iskoola Pota"/>
+        <a:font script="Mong" typeface="Mongolian Baiti"/>
+        <a:font script="Viet" typeface="Times New Roman"/>
+        <a:font script="Uigh" typeface="Microsoft Uighur"/>
+        <a:font script="Geor" typeface="Sylfaen"/>
+        <a:font script="Armn" typeface="Arial"/>
+        <a:font script="Bugi" typeface="Leelawadee UI"/>
+        <a:font script="Bopo" typeface="Microsoft JhengHei"/>
+        <a:font script="Java" typeface="Javanese Text"/>
+        <a:font script="Lisu" typeface="Segoe UI"/>
+        <a:font script="Mymr" typeface="Myanmar Text"/>
+        <a:font script="Nkoo" typeface="Ebrima"/>
+        <a:font script="Olck" typeface="Nirmala UI"/>
+        <a:font script="Osma" typeface="Ebrima"/>
+        <a:font script="Phag" typeface="Phagspa"/>
+        <a:font script="Syrn" typeface="Estrangelo Edessa"/>
+        <a:font script="Syrj" typeface="Estrangelo Edessa"/>
+        <a:font script="Syre" typeface="Estrangelo Edessa"/>
+        <a:font script="Sora" typeface="Nirmala UI"/>
+        <a:font script="Tale" typeface="Microsoft Tai Le"/>
+        <a:font script="Talu" typeface="Microsoft New Tai Lue"/>
+        <a:font script="Tfng" typeface="Ebrima"/>
+      </a:majorFont>
+      <a:minorFont>
+        <a:latin typeface="Calibri" panose="020F0502020204030204"/>
+        <a:ea typeface=""/>
+        <a:cs typeface=""/>
+        <a:font script="Jpan" typeface="游ゴシック"/>
+        <a:font script="Hang" typeface="맑은 고딕"/>
+        <a:font script="Hans" typeface="等线"/>
+        <a:font script="Hant" typeface="新細明體"/>
+        <a:font script="Arab" typeface="Arial"/>
+        <a:font script="Hebr" typeface="Arial"/>
+        <a:font script="Thai" typeface="Cordia New"/>
+        <a:font script="Ethi" typeface="Nyala"/>
+        <a:font script="Beng" typeface="Vrinda"/>
+        <a:font script="Gujr" typeface="Shruti"/>
+        <a:font script="Khmr" typeface="DaunPenh"/>
+        <a:font script="Knda" typeface="Tunga"/>
+        <a:font script="Guru" typeface="Raavi"/>
+        <a:font script="Cans" typeface="Euphemia"/>
+        <a:font script="Cher" typeface="Plantagenet Cherokee"/>
+        <a:font script="Yiii" typeface="Microsoft Yi Baiti"/>
+        <a:font script="Tibt" typeface="Microsoft Himalaya"/>
+        <a:font script="Thaa" typeface="MV Boli"/>
+        <a:font script="Deva" typeface="Mangal"/>
+        <a:font script="Telu" typeface="Gautami"/>
+        <a:font script="Taml" typeface="Latha"/>
+        <a:font script="Syrc" typeface="Estrangelo Edessa"/>
+        <a:font script="Orya" typeface="Kalinga"/>
+        <a:font script="Mlym" typeface="Kartika"/>
+        <a:font script="Laoo" typeface="DokChampa"/>
+        <a:font script="Sinh" typeface="Iskoola Pota"/>
+        <a:font script="Mong" typeface="Mongolian Baiti"/>
+        <a:font script="Viet" typeface="Arial"/>
+        <a:font script="Uigh" typeface="Microsoft Uighur"/>
+        <a:font script="Geor" typeface="Sylfaen"/>
+        <a:font script="Armn" typeface="Arial"/>
+        <a:font script="Bugi" typeface="Leelawadee UI"/>
+        <a:font script="Bopo" typeface="Microsoft JhengHei"/>
+        <a:font script="Java" typeface="Javanese Text"/>
+        <a:font script="Lisu" typeface="Segoe UI"/>
+        <a:font script="Mymr" typeface="Myanmar Text"/>
+        <a:font script="Nkoo" typeface="Ebrima"/>
+        <a:font script="Olck" typeface="Nirmala UI"/>
+        <a:font script="Osma" typeface="Ebrima"/>
+        <a:font script="Phag" typeface="Phagspa"/>
+        <a:font script="Syrn" typeface="Estrangelo Edessa"/>
+        <a:font script="Syrj" typeface="Estrangelo Edessa"/>
+        <a:font script="Syre" typeface="Estrangelo Edessa"/>
+        <a:font script="Sora" typeface="Nirmala UI"/>
+        <a:font script="Tale" typeface="Microsoft Tai Le"/>
+        <a:font script="Talu" typeface="Microsoft New Tai Lue"/>
+        <a:font script="Tfng" typeface="Ebrima"/>
+      </a:minorFont>
+    </a:fontScheme>
+    <a:fmtScheme name="Office">
+      <a:fillStyleLst>
+        <a:solidFill>
+          <a:schemeClr val="phClr"/>
+        </a:solidFill>
+        <a:gradFill rotWithShape="1">
+          <a:gsLst>
+            <a:gs pos="0">
+              <a:schemeClr val="phClr">
+                <a:lumMod val="110000"/>
+                <a:satMod val="105000"/>
+                <a:tint val="67000"/>
+              </a:schemeClr>
+            </a:gs>
+            <a:gs pos="50000">
+              <a:schemeClr val="phClr">
+                <a:lumMod val="105000"/>
+                <a:satMod val="103000"/>
+                <a:tint val="73000"/>
+              </a:schemeClr>
+            </a:gs>
+            <a:gs pos="100000">
+              <a:schemeClr val="phClr">
+                <a:lumMod val="105000"/>
+                <a:satMod val="109000"/>
+                <a:tint val="81000"/>
+              </a:schemeClr>
+            </a:gs>
+          </a:gsLst>
+          <a:lin ang="5400000" scaled="0"/>
+        </a:gradFill>
+        <a:gradFill rotWithShape="1">
+          <a:gsLst>
+            <a:gs pos="0">
+              <a:schemeClr val="phClr">
+                <a:satMod val="103000"/>
+                <a:lumMod val="102000"/>
+                <a:tint val="94000"/>
+              </a:schemeClr>
+            </a:gs>
+            <a:gs pos="50000">
+              <a:schemeClr val="phClr">
+                <a:satMod val="110000"/>
+                <a:lumMod val="100000"/>
+                <a:shade val="100000"/>
+              </a:schemeClr>
+            </a:gs>
+            <a:gs pos="100000">
+              <a:schemeClr val="phClr">
+                <a:lumMod val="99000"/>
+                <a:satMod val="120000"/>
+                <a:shade val="78000"/>
+              </a:schemeClr>
+            </a:gs>
+          </a:gsLst>
+          <a:lin ang="5400000" scaled="0"/>
+        </a:gradFill>
+      </a:fillStyleLst>
+      <a:lnStyleLst>
+        <a:ln w="6350" cap="flat" cmpd="sng" algn="ctr">
+          <a:solidFill>
+            <a:schemeClr val="phClr"/>
+          </a:solidFill>
+          <a:prstDash val="solid"/>
+          <a:miter lim="800000"/>
+        </a:ln>
+        <a:ln w="12700" cap="flat" cmpd="sng" algn="ctr">
+          <a:solidFill>
+            <a:schemeClr val="phClr"/>
+          </a:solidFill>
+          <a:prstDash val="solid"/>
+          <a:miter lim="800000"/>
+        </a:ln>
+        <a:ln w="19050" cap="flat" cmpd="sng" algn="ctr">
+          <a:solidFill>
+            <a:schemeClr val="phClr"/>
+          </a:solidFill>
+          <a:prstDash val="solid"/>
+          <a:miter lim="800000"/>
+        </a:ln>
+      </a:lnStyleLst>
+      <a:effectStyleLst>
+        <a:effectStyle>
+          <a:effectLst/>
+        </a:effectStyle>
+        <a:effectStyle>
+          <a:effectLst/>
+        </a:effectStyle>
+        <a:effectStyle>
+          <a:effectLst>
+            <a:outerShdw blurRad="57150" dist="19050" dir="5400000" algn="ctr" rotWithShape="0">
+              <a:srgbClr val="000000">
+                <a:alpha val="63000"/>
+              </a:srgbClr>
+            </a:outerShdw>
+          </a:effectLst>
+        </a:effectStyle>
+      </a:effectStyleLst>
+      <a:bgFillStyleLst>
+        <a:solidFill>
+          <a:schemeClr val="phClr"/>
+        </a:solidFill>
+        <a:solidFill>
+          <a:schemeClr val="phClr">
+            <a:tint val="95000"/>
+            <a:satMod val="170000"/>
+          </a:schemeClr>
+        </a:solidFill>
+        <a:gradFill rotWithShape="1">
+          <a:gsLst>
+            <a:gs pos="0">
+              <a:schemeClr val="phClr">
+                <a:tint val="93000"/>
+                <a:satMod val="150000"/>
+                <a:shade val="98000"/>
+                <a:lumMod val="102000"/>
+              </a:schemeClr>
+            </a:gs>
+            <a:gs pos="50000">
+              <a:schemeClr val="phClr">
+                <a:tint val="98000"/>
+                <a:satMod val="130000"/>
+                <a:shade val="90000"/>
+                <a:lumMod val="103000"/>
+              </a:schemeClr>
+            </a:gs>
+            <a:gs pos="100000">
+              <a:schemeClr val="phClr">
+                <a:shade val="63000"/>
+                <a:satMod val="120000"/>
+              </a:schemeClr>
+            </a:gs>
+          </a:gsLst>
+          <a:lin ang="5400000" scaled="0"/>
+        </a:gradFill>
+      </a:bgFillStyleLst>
+    </a:fmtScheme>
+  </a:themeElements>
+  <a:objectDefaults/>
+  <a:extraClrSchemeLst/>
+  <a:extLst>
+    <a:ext uri="{05A4C25C-085E-4340-85A3-A5531E510DB2}">
+      <thm15:themeFamily xmlns:thm15="http://schemas.microsoft.com/office/thememl/2012/main" name="Office Theme" id="{62F939B6-93AF-4DB8-9C6B-D6C7DFDC589F}" vid="{4A3C46E8-61CC-4603-A589-7422A47A8E4A}"/>
+    </a:ext>
+  </a:extLst>
+</a:theme>
 </file>
--- a/setup-de/Datenanalyse.pptx
+++ b/setup-de/Datenanalyse.pptx
@@ -5,13 +5,12 @@
     <p:sldMasterId id="2147483648" r:id="rId1"/>
   </p:sldMasterIdLst>
   <p:notesMasterIdLst>
-    <p:notesMasterId r:id="rId6"/>
+    <p:notesMasterId r:id="rId5"/>
   </p:notesMasterIdLst>
   <p:sldIdLst>
     <p:sldId id="256" r:id="rId2"/>
     <p:sldId id="259" r:id="rId3"/>
     <p:sldId id="260" r:id="rId4"/>
-    <p:sldId id="258" r:id="rId5"/>
   </p:sldIdLst>
   <p:sldSz cx="12192000" cy="6858000"/>
   <p:notesSz cx="6858000" cy="9144000"/>
@@ -957,90 +956,6 @@
     <p:extLst>
       <p:ext uri="{BB962C8B-B14F-4D97-AF65-F5344CB8AC3E}">
         <p14:creationId xmlns:p14="http://schemas.microsoft.com/office/powerpoint/2010/main" val="2248453732"/>
-      </p:ext>
-    </p:extLst>
-  </p:cSld>
-  <p:clrMapOvr>
-    <a:masterClrMapping/>
-  </p:clrMapOvr>
-</p:notes>
-</file>
-
-<file path=ppt/notesSlides/notesSlide3.xml><?xml version="1.0" encoding="utf-8"?>
-<p:notes xmlns:a="http://schemas.openxmlformats.org/drawingml/2006/main" xmlns:r="http://schemas.openxmlformats.org/officeDocument/2006/relationships" xmlns:p="http://schemas.openxmlformats.org/presentationml/2006/main">
-  <p:cSld>
-    <p:spTree>
-      <p:nvGrpSpPr>
-        <p:cNvPr id="1" name=""/>
-        <p:cNvGrpSpPr/>
-        <p:nvPr/>
-      </p:nvGrpSpPr>
-      <p:grpSpPr>
-        <a:xfrm>
-          <a:off x="0" y="0"/>
-          <a:ext cx="0" cy="0"/>
-          <a:chOff x="0" y="0"/>
-          <a:chExt cx="0" cy="0"/>
-        </a:xfrm>
-      </p:grpSpPr>
-      <p:sp>
-        <p:nvSpPr>
-          <p:cNvPr id="2" name="Slide Image Placeholder 1"/>
-          <p:cNvSpPr>
-            <a:spLocks noGrp="1" noRot="1" noChangeAspect="1"/>
-          </p:cNvSpPr>
-          <p:nvPr>
-            <p:ph type="sldImg"/>
-          </p:nvPr>
-        </p:nvSpPr>
-        <p:spPr/>
-      </p:sp>
-      <p:sp>
-        <p:nvSpPr>
-          <p:cNvPr id="3" name="Notes Placeholder 2"/>
-          <p:cNvSpPr>
-            <a:spLocks noGrp="1"/>
-          </p:cNvSpPr>
-          <p:nvPr>
-            <p:ph type="body" idx="1"/>
-          </p:nvPr>
-        </p:nvSpPr>
-        <p:spPr/>
-        <p:txBody>
-          <a:bodyPr/>
-          <a:lstStyle/>
-          <a:p>
-            <a:endParaRPr lang="LID4096" dirty="0"/>
-          </a:p>
-        </p:txBody>
-      </p:sp>
-      <p:sp>
-        <p:nvSpPr>
-          <p:cNvPr id="4" name="Slide Number Placeholder 3"/>
-          <p:cNvSpPr>
-            <a:spLocks noGrp="1"/>
-          </p:cNvSpPr>
-          <p:nvPr>
-            <p:ph type="sldNum" sz="quarter" idx="5"/>
-          </p:nvPr>
-        </p:nvSpPr>
-        <p:spPr/>
-        <p:txBody>
-          <a:bodyPr/>
-          <a:lstStyle/>
-          <a:p>
-            <a:fld id="{60C2D7CD-EEF3-4145-A484-A9D67FF727B1}" type="slidenum">
-              <a:rPr lang="LID4096" smtClean="0"/>
-              <a:t>4</a:t>
-            </a:fld>
-            <a:endParaRPr lang="LID4096"/>
-          </a:p>
-        </p:txBody>
-      </p:sp>
-    </p:spTree>
-    <p:extLst>
-      <p:ext uri="{BB962C8B-B14F-4D97-AF65-F5344CB8AC3E}">
-        <p14:creationId xmlns:p14="http://schemas.microsoft.com/office/powerpoint/2010/main" val="4131942357"/>
       </p:ext>
     </p:extLst>
   </p:cSld>
@@ -7953,175 +7868,6 @@
 </p:sld>
 </file>
 
-<file path=ppt/slides/slide4.xml><?xml version="1.0" encoding="utf-8"?>
-<p:sld xmlns:a="http://schemas.openxmlformats.org/drawingml/2006/main" xmlns:r="http://schemas.openxmlformats.org/officeDocument/2006/relationships" xmlns:p="http://schemas.openxmlformats.org/presentationml/2006/main">
-  <p:cSld>
-    <p:spTree>
-      <p:nvGrpSpPr>
-        <p:cNvPr id="1" name=""/>
-        <p:cNvGrpSpPr/>
-        <p:nvPr/>
-      </p:nvGrpSpPr>
-      <p:grpSpPr>
-        <a:xfrm>
-          <a:off x="0" y="0"/>
-          <a:ext cx="0" cy="0"/>
-          <a:chOff x="0" y="0"/>
-          <a:chExt cx="0" cy="0"/>
-        </a:xfrm>
-      </p:grpSpPr>
-      <p:sp>
-        <p:nvSpPr>
-          <p:cNvPr id="12" name="Title 11">
-            <a:extLst>
-              <a:ext uri="{FF2B5EF4-FFF2-40B4-BE49-F238E27FC236}">
-                <a16:creationId xmlns:a16="http://schemas.microsoft.com/office/drawing/2014/main" id="{53350414-66B4-C647-894A-7083B12CF11E}"/>
-              </a:ext>
-            </a:extLst>
-          </p:cNvPr>
-          <p:cNvSpPr>
-            <a:spLocks noGrp="1"/>
-          </p:cNvSpPr>
-          <p:nvPr>
-            <p:ph type="title"/>
-          </p:nvPr>
-        </p:nvSpPr>
-        <p:spPr/>
-        <p:txBody>
-          <a:bodyPr/>
-          <a:lstStyle/>
-          <a:p>
-            <a:r>
-              <a:rPr lang="en-US" dirty="0"/>
-              <a:t>Setup</a:t>
-            </a:r>
-            <a:endParaRPr lang="LID4096" dirty="0"/>
-          </a:p>
-        </p:txBody>
-      </p:sp>
-      <p:sp>
-        <p:nvSpPr>
-          <p:cNvPr id="13" name="Content Placeholder 12">
-            <a:extLst>
-              <a:ext uri="{FF2B5EF4-FFF2-40B4-BE49-F238E27FC236}">
-                <a16:creationId xmlns:a16="http://schemas.microsoft.com/office/drawing/2014/main" id="{0EB4BC45-F75A-72D7-B0DE-B45A8055C32F}"/>
-              </a:ext>
-            </a:extLst>
-          </p:cNvPr>
-          <p:cNvSpPr>
-            <a:spLocks noGrp="1"/>
-          </p:cNvSpPr>
-          <p:nvPr>
-            <p:ph idx="1"/>
-          </p:nvPr>
-        </p:nvSpPr>
-        <p:spPr/>
-        <p:txBody>
-          <a:bodyPr>
-            <a:normAutofit/>
-          </a:bodyPr>
-          <a:lstStyle/>
-          <a:p>
-            <a:r>
-              <a:rPr lang="de-DE" sz="1800" b="1" dirty="0"/>
-              <a:t>Bitte folgen Sie den Setup-Anweisungen Schritt für Schritt:</a:t>
-            </a:r>
-          </a:p>
-          <a:p>
-            <a:endParaRPr lang="de-DE" sz="1800" dirty="0"/>
-          </a:p>
-          <a:p>
-            <a:r>
-              <a:rPr lang="de-DE" sz="1800" b="1" dirty="0"/>
-              <a:t>Python einrichten</a:t>
-            </a:r>
-            <a:br>
-              <a:rPr lang="de-DE" sz="1800" dirty="0"/>
-            </a:br>
-            <a:r>
-              <a:rPr lang="de-DE" sz="1800" dirty="0"/>
-              <a:t>Link: </a:t>
-            </a:r>
-            <a:r>
-              <a:rPr lang="de-DE" sz="1800" dirty="0">
-                <a:hlinkClick r:id="rId3"/>
-              </a:rPr>
-              <a:t>https://alidxmt.github.io/data-analysis-course/setup-de/1-setup-python</a:t>
-            </a:r>
-            <a:endParaRPr lang="de-DE" sz="1800" dirty="0"/>
-          </a:p>
-          <a:p>
-            <a:r>
-              <a:rPr lang="de-DE" sz="1800" b="1" dirty="0" err="1"/>
-              <a:t>VSCode</a:t>
-            </a:r>
-            <a:r>
-              <a:rPr lang="de-DE" sz="1800" b="1" dirty="0"/>
-              <a:t> einrichten</a:t>
-            </a:r>
-            <a:br>
-              <a:rPr lang="de-DE" sz="1800" dirty="0"/>
-            </a:br>
-            <a:r>
-              <a:rPr lang="de-DE" sz="1800" dirty="0"/>
-              <a:t>Link: </a:t>
-            </a:r>
-            <a:r>
-              <a:rPr lang="de-DE" sz="1800" dirty="0">
-                <a:hlinkClick r:id="rId4"/>
-              </a:rPr>
-              <a:t>https://alidxmt.github.io/data-analysis-course/setup-de/2-setup-vscode</a:t>
-            </a:r>
-            <a:endParaRPr lang="de-DE" sz="1800" dirty="0"/>
-          </a:p>
-          <a:p>
-            <a:r>
-              <a:rPr lang="de-DE" sz="1800" b="1" dirty="0" err="1"/>
-              <a:t>Git</a:t>
-            </a:r>
-            <a:r>
-              <a:rPr lang="de-DE" sz="1800" b="1" dirty="0"/>
-              <a:t>-Umgebung einrichten</a:t>
-            </a:r>
-            <a:br>
-              <a:rPr lang="de-DE" sz="1800" dirty="0"/>
-            </a:br>
-            <a:r>
-              <a:rPr lang="de-DE" sz="1800" dirty="0"/>
-              <a:t>Link: </a:t>
-            </a:r>
-            <a:r>
-              <a:rPr lang="de-DE" sz="1800" dirty="0">
-                <a:hlinkClick r:id="rId5"/>
-              </a:rPr>
-              <a:t>https://alidxmt.github.io/data-analysis-course/setup-de/3-setup-git-env</a:t>
-            </a:r>
-            <a:endParaRPr lang="de-DE" sz="1800" dirty="0"/>
-          </a:p>
-          <a:p>
-            <a:r>
-              <a:rPr lang="de-DE" sz="1800" dirty="0"/>
-              <a:t>Bitte öffnen Sie jeden Link nacheinander und folgen Sie den Anweisungen sorgfältig.</a:t>
-            </a:r>
-          </a:p>
-          <a:p>
-            <a:endParaRPr lang="LID4096" sz="1800" dirty="0"/>
-          </a:p>
-        </p:txBody>
-      </p:sp>
-    </p:spTree>
-    <p:extLst>
-      <p:ext uri="{BB962C8B-B14F-4D97-AF65-F5344CB8AC3E}">
-        <p14:creationId xmlns:p14="http://schemas.microsoft.com/office/powerpoint/2010/main" val="2672100624"/>
-      </p:ext>
-    </p:extLst>
-  </p:cSld>
-  <p:clrMapOvr>
-    <a:masterClrMapping/>
-  </p:clrMapOvr>
-</p:sld>
-</file>
-
 <file path=ppt/theme/theme1.xml><?xml version="1.0" encoding="utf-8"?>
 <a:theme xmlns:a="http://schemas.openxmlformats.org/drawingml/2006/main" name="Office Theme">
   <a:themeElements>

--- a/setup-de/Datenanalyse.pptx
+++ b/setup-de/Datenanalyse.pptx
@@ -5327,7 +5327,7 @@
         <p:spPr>
           <a:xfrm>
             <a:off x="358375" y="1490503"/>
-            <a:ext cx="6096680" cy="4185761"/>
+            <a:ext cx="6096680" cy="4247317"/>
           </a:xfrm>
           <a:prstGeom prst="rect">
             <a:avLst/>
@@ -5372,7 +5372,7 @@
             </a:r>
             <a:r>
               <a:rPr lang="de-DE" sz="1400" dirty="0" err="1"/>
-              <a:t>Jupzter</a:t>
+              <a:t>Jupyter</a:t>
             </a:r>
             <a:r>
               <a:rPr lang="de-DE" sz="1400" dirty="0"/>
@@ -5390,8 +5390,32 @@
               <a:buChar char="•"/>
             </a:pPr>
             <a:r>
+              <a:rPr lang="en-US" sz="1400" dirty="0" err="1"/>
+              <a:t>Arbeiten</a:t>
+            </a:r>
+            <a:r>
+              <a:rPr lang="en-US" sz="1400" dirty="0"/>
+              <a:t> </a:t>
+            </a:r>
+            <a:r>
+              <a:rPr lang="en-US" sz="1400" dirty="0" err="1"/>
+              <a:t>mit</a:t>
+            </a:r>
+            <a:r>
+              <a:rPr lang="en-US" sz="1400" dirty="0"/>
+              <a:t> </a:t>
+            </a:r>
+            <a:r>
+              <a:rPr lang="en-US" sz="1400" dirty="0" err="1"/>
+              <a:t>Jupyter</a:t>
+            </a:r>
+            <a:r>
+              <a:rPr lang="en-US" sz="1400" dirty="0"/>
+              <a:t> | </a:t>
+            </a:r>
+            <a:r>
               <a:rPr lang="de-DE" sz="1400" dirty="0"/>
-              <a:t>Überblick über Datentypen</a:t>
+              <a:t>Überblick über Datentypen </a:t>
             </a:r>
           </a:p>
           <a:p>
@@ -5401,8 +5425,13 @@
             </a:pPr>
             <a:r>
               <a:rPr lang="de-DE" sz="1400" dirty="0"/>
-              <a:t>Data | Information</a:t>
-            </a:r>
+              <a:t>Data | Information </a:t>
+            </a:r>
+            <a:r>
+              <a:rPr lang="de-DE" sz="1400"/>
+              <a:t>| Dataset</a:t>
+            </a:r>
+            <a:endParaRPr lang="de-DE" sz="1400" dirty="0"/>
           </a:p>
           <a:p>
             <a:pPr>

--- a/setup-de/Datenanalyse.pptx
+++ b/setup-de/Datenanalyse.pptx
@@ -1208,30 +1208,6 @@
                 <a:cs typeface="+mn-cs"/>
               </a:rPr>
             </a:br>
-            <a:endParaRPr lang="en-US" sz="1200" b="0" i="0" kern="1200" dirty="0">
-              <a:solidFill>
-                <a:schemeClr val="tx1"/>
-              </a:solidFill>
-              <a:effectLst/>
-              <a:latin typeface="+mn-lt"/>
-              <a:ea typeface="+mn-ea"/>
-              <a:cs typeface="+mn-cs"/>
-            </a:endParaRPr>
-          </a:p>
-          <a:p>
-            <a:pPr rtl="0"/>
-            <a:r>
-              <a:rPr lang="en-US" sz="1200" b="1" i="0" kern="1200" dirty="0">
-                <a:solidFill>
-                  <a:schemeClr val="tx1"/>
-                </a:solidFill>
-                <a:effectLst/>
-                <a:latin typeface="+mn-lt"/>
-                <a:ea typeface="+mn-ea"/>
-                <a:cs typeface="+mn-cs"/>
-              </a:rPr>
-              <a:t>Slides 3 &amp; 4: </a:t>
-            </a:r>
             <a:r>
               <a:rPr lang="en-US" sz="1200" b="1" i="0" kern="1200" dirty="0" err="1">
                 <a:solidFill>
@@ -1952,7 +1928,7 @@
                 <a:ea typeface="+mn-ea"/>
                 <a:cs typeface="+mn-cs"/>
               </a:rPr>
-              <a:t>Datensätzen</a:t>
+              <a:t>Datentypen</a:t>
             </a:r>
             <a:r>
               <a:rPr lang="en-US" sz="1200" b="0" i="0" kern="1200" dirty="0">
